--- a/DAS e RAID/DAS_RAID_Slides.pptx
+++ b/DAS e RAID/DAS_RAID_Slides.pptx
@@ -21,6 +21,9 @@
     <p:sldId id="269" r:id="rId15"/>
     <p:sldId id="270" r:id="rId16"/>
     <p:sldId id="271" r:id="rId17"/>
+    <p:sldId id="277" r:id="rId28"/>
+    <p:sldId id="276" r:id="rId27"/>
+    <p:sldId id="275" r:id="rId26"/>
     <p:sldId id="272" r:id="rId18"/>
     <p:sldId id="273" r:id="rId19"/>
     <p:sldId id="274" r:id="rId20"/>
@@ -2498,6 +2501,10 @@
           </a:solidFill>
           <a:ln/>
         </p:spPr>
+        <p:txBody>
+          <a:bodyPr/>
+          <a:p/>
+        </p:txBody>
       </p:sp>
       <p:sp>
         <p:nvSpPr>
@@ -2520,6 +2527,10 @@
           </a:solidFill>
           <a:ln/>
         </p:spPr>
+        <p:txBody>
+          <a:bodyPr/>
+          <a:p/>
+        </p:txBody>
       </p:sp>
       <p:sp>
         <p:nvSpPr>
@@ -2850,6 +2861,10 @@
             <a:prstDash val="solid"/>
           </a:ln>
         </p:spPr>
+        <p:txBody>
+          <a:bodyPr/>
+          <a:p/>
+        </p:txBody>
       </p:sp>
       <p:sp>
         <p:nvSpPr>
@@ -2914,6 +2929,10 @@
             <a:prstDash val="solid"/>
           </a:ln>
         </p:spPr>
+        <p:txBody>
+          <a:bodyPr/>
+          <a:p/>
+        </p:txBody>
       </p:sp>
       <p:sp>
         <p:nvSpPr>
@@ -3017,6 +3036,10 @@
             <a:prstDash val="solid"/>
           </a:ln>
         </p:spPr>
+        <p:txBody>
+          <a:bodyPr/>
+          <a:p/>
+        </p:txBody>
       </p:sp>
       <p:sp>
         <p:nvSpPr>
@@ -3081,6 +3104,10 @@
             <a:prstDash val="solid"/>
           </a:ln>
         </p:spPr>
+        <p:txBody>
+          <a:bodyPr/>
+          <a:p/>
+        </p:txBody>
       </p:sp>
       <p:sp>
         <p:nvSpPr>
@@ -3184,6 +3211,10 @@
             <a:prstDash val="solid"/>
           </a:ln>
         </p:spPr>
+        <p:txBody>
+          <a:bodyPr/>
+          <a:p/>
+        </p:txBody>
       </p:sp>
       <p:sp>
         <p:nvSpPr>
@@ -3248,6 +3279,10 @@
             <a:prstDash val="solid"/>
           </a:ln>
         </p:spPr>
+        <p:txBody>
+          <a:bodyPr/>
+          <a:p/>
+        </p:txBody>
       </p:sp>
       <p:sp>
         <p:nvSpPr>
@@ -3351,6 +3386,10 @@
             <a:prstDash val="solid"/>
           </a:ln>
         </p:spPr>
+        <p:txBody>
+          <a:bodyPr/>
+          <a:p/>
+        </p:txBody>
       </p:sp>
       <p:sp>
         <p:nvSpPr>
@@ -3415,6 +3454,10 @@
             <a:prstDash val="solid"/>
           </a:ln>
         </p:spPr>
+        <p:txBody>
+          <a:bodyPr/>
+          <a:p/>
+        </p:txBody>
       </p:sp>
       <p:sp>
         <p:nvSpPr>
@@ -3578,6 +3621,10 @@
             <a:prstDash val="solid"/>
           </a:ln>
         </p:spPr>
+        <p:txBody>
+          <a:bodyPr/>
+          <a:p/>
+        </p:txBody>
       </p:sp>
       <p:sp>
         <p:nvSpPr>
@@ -3642,6 +3689,10 @@
             <a:prstDash val="solid"/>
           </a:ln>
         </p:spPr>
+        <p:txBody>
+          <a:bodyPr/>
+          <a:p/>
+        </p:txBody>
       </p:sp>
       <p:sp>
         <p:nvSpPr>
@@ -3706,6 +3757,10 @@
             <a:prstDash val="solid"/>
           </a:ln>
         </p:spPr>
+        <p:txBody>
+          <a:bodyPr/>
+          <a:p/>
+        </p:txBody>
       </p:sp>
       <p:sp>
         <p:nvSpPr>
@@ -3770,6 +3825,10 @@
             <a:prstDash val="solid"/>
           </a:ln>
         </p:spPr>
+        <p:txBody>
+          <a:bodyPr/>
+          <a:p/>
+        </p:txBody>
       </p:sp>
       <p:sp>
         <p:nvSpPr>
@@ -3873,6 +3932,10 @@
             <a:prstDash val="solid"/>
           </a:ln>
         </p:spPr>
+        <p:txBody>
+          <a:bodyPr/>
+          <a:p/>
+        </p:txBody>
       </p:sp>
       <p:sp>
         <p:nvSpPr>
@@ -3937,6 +4000,10 @@
             <a:prstDash val="solid"/>
           </a:ln>
         </p:spPr>
+        <p:txBody>
+          <a:bodyPr/>
+          <a:p/>
+        </p:txBody>
       </p:sp>
       <p:sp>
         <p:nvSpPr>
@@ -4001,6 +4068,10 @@
             <a:prstDash val="solid"/>
           </a:ln>
         </p:spPr>
+        <p:txBody>
+          <a:bodyPr/>
+          <a:p/>
+        </p:txBody>
       </p:sp>
       <p:sp>
         <p:nvSpPr>
@@ -4393,6 +4464,10 @@
             <a:prstDash val="solid"/>
           </a:ln>
         </p:spPr>
+        <p:txBody>
+          <a:bodyPr/>
+          <a:p/>
+        </p:txBody>
       </p:sp>
       <p:sp>
         <p:nvSpPr>
@@ -4457,6 +4532,10 @@
             <a:prstDash val="solid"/>
           </a:ln>
         </p:spPr>
+        <p:txBody>
+          <a:bodyPr/>
+          <a:p/>
+        </p:txBody>
       </p:sp>
       <p:sp>
         <p:nvSpPr>
@@ -4521,6 +4600,10 @@
             <a:prstDash val="solid"/>
           </a:ln>
         </p:spPr>
+        <p:txBody>
+          <a:bodyPr/>
+          <a:p/>
+        </p:txBody>
       </p:sp>
       <p:sp>
         <p:nvSpPr>
@@ -4585,6 +4668,10 @@
             <a:prstDash val="solid"/>
           </a:ln>
         </p:spPr>
+        <p:txBody>
+          <a:bodyPr/>
+          <a:p/>
+        </p:txBody>
       </p:sp>
       <p:sp>
         <p:nvSpPr>
@@ -4688,6 +4775,10 @@
             <a:prstDash val="solid"/>
           </a:ln>
         </p:spPr>
+        <p:txBody>
+          <a:bodyPr/>
+          <a:p/>
+        </p:txBody>
       </p:sp>
       <p:sp>
         <p:nvSpPr>
@@ -4752,6 +4843,10 @@
             <a:prstDash val="solid"/>
           </a:ln>
         </p:spPr>
+        <p:txBody>
+          <a:bodyPr/>
+          <a:p/>
+        </p:txBody>
       </p:sp>
       <p:sp>
         <p:nvSpPr>
@@ -4816,6 +4911,10 @@
             <a:prstDash val="solid"/>
           </a:ln>
         </p:spPr>
+        <p:txBody>
+          <a:bodyPr/>
+          <a:p/>
+        </p:txBody>
       </p:sp>
       <p:sp>
         <p:nvSpPr>
@@ -4880,6 +4979,10 @@
             <a:prstDash val="solid"/>
           </a:ln>
         </p:spPr>
+        <p:txBody>
+          <a:bodyPr/>
+          <a:p/>
+        </p:txBody>
       </p:sp>
       <p:sp>
         <p:nvSpPr>
@@ -4983,6 +5086,10 @@
             <a:prstDash val="solid"/>
           </a:ln>
         </p:spPr>
+        <p:txBody>
+          <a:bodyPr/>
+          <a:p/>
+        </p:txBody>
       </p:sp>
       <p:sp>
         <p:nvSpPr>
@@ -5047,6 +5154,10 @@
             <a:prstDash val="solid"/>
           </a:ln>
         </p:spPr>
+        <p:txBody>
+          <a:bodyPr/>
+          <a:p/>
+        </p:txBody>
       </p:sp>
       <p:sp>
         <p:nvSpPr>
@@ -5111,6 +5222,10 @@
             <a:prstDash val="solid"/>
           </a:ln>
         </p:spPr>
+        <p:txBody>
+          <a:bodyPr/>
+          <a:p/>
+        </p:txBody>
       </p:sp>
       <p:sp>
         <p:nvSpPr>
@@ -5175,6 +5290,10 @@
             <a:prstDash val="solid"/>
           </a:ln>
         </p:spPr>
+        <p:txBody>
+          <a:bodyPr/>
+          <a:p/>
+        </p:txBody>
       </p:sp>
       <p:sp>
         <p:nvSpPr>
@@ -5278,6 +5397,10 @@
             <a:prstDash val="solid"/>
           </a:ln>
         </p:spPr>
+        <p:txBody>
+          <a:bodyPr/>
+          <a:p/>
+        </p:txBody>
       </p:sp>
       <p:sp>
         <p:nvSpPr>
@@ -5342,6 +5465,10 @@
             <a:prstDash val="solid"/>
           </a:ln>
         </p:spPr>
+        <p:txBody>
+          <a:bodyPr/>
+          <a:p/>
+        </p:txBody>
       </p:sp>
       <p:sp>
         <p:nvSpPr>
@@ -5406,6 +5533,10 @@
             <a:prstDash val="solid"/>
           </a:ln>
         </p:spPr>
+        <p:txBody>
+          <a:bodyPr/>
+          <a:p/>
+        </p:txBody>
       </p:sp>
       <p:sp>
         <p:nvSpPr>
@@ -5470,6 +5601,10 @@
             <a:prstDash val="solid"/>
           </a:ln>
         </p:spPr>
+        <p:txBody>
+          <a:bodyPr/>
+          <a:p/>
+        </p:txBody>
       </p:sp>
       <p:sp>
         <p:nvSpPr>
@@ -5604,7 +5739,7 @@
                 <a:ea typeface="Calibri" pitchFamily="34" charset="-122"/>
                 <a:cs typeface="Calibri" pitchFamily="34" charset="-120"/>
               </a:rPr>
-              <a:t>Uso recomendado: uso geral em SBD — melhor equilíbrio custo × desempenho × confiabilidade</a:t>
+              <a:t>Uso condicionado: avaliar URE, duração/carga de rebuild, escrita pequena e RPO/RTO</a:t>
             </a:r>
             <a:endParaRPr lang="en-US" sz="1300" dirty="0"/>
           </a:p>
@@ -5861,6 +5996,10 @@
             <a:prstDash val="solid"/>
           </a:ln>
         </p:spPr>
+        <p:txBody>
+          <a:bodyPr/>
+          <a:p/>
+        </p:txBody>
       </p:sp>
       <p:sp>
         <p:nvSpPr>
@@ -5925,6 +6064,10 @@
             <a:prstDash val="solid"/>
           </a:ln>
         </p:spPr>
+        <p:txBody>
+          <a:bodyPr/>
+          <a:p/>
+        </p:txBody>
       </p:sp>
       <p:sp>
         <p:nvSpPr>
@@ -5989,6 +6132,10 @@
             <a:prstDash val="solid"/>
           </a:ln>
         </p:spPr>
+        <p:txBody>
+          <a:bodyPr/>
+          <a:p/>
+        </p:txBody>
       </p:sp>
       <p:sp>
         <p:nvSpPr>
@@ -6053,6 +6200,10 @@
             <a:prstDash val="solid"/>
           </a:ln>
         </p:spPr>
+        <p:txBody>
+          <a:bodyPr/>
+          <a:p/>
+        </p:txBody>
       </p:sp>
       <p:sp>
         <p:nvSpPr>
@@ -6156,6 +6307,10 @@
             <a:prstDash val="solid"/>
           </a:ln>
         </p:spPr>
+        <p:txBody>
+          <a:bodyPr/>
+          <a:p/>
+        </p:txBody>
       </p:sp>
       <p:sp>
         <p:nvSpPr>
@@ -6220,6 +6375,10 @@
             <a:prstDash val="solid"/>
           </a:ln>
         </p:spPr>
+        <p:txBody>
+          <a:bodyPr/>
+          <a:p/>
+        </p:txBody>
       </p:sp>
       <p:sp>
         <p:nvSpPr>
@@ -6284,6 +6443,10 @@
             <a:prstDash val="solid"/>
           </a:ln>
         </p:spPr>
+        <p:txBody>
+          <a:bodyPr/>
+          <a:p/>
+        </p:txBody>
       </p:sp>
       <p:sp>
         <p:nvSpPr>
@@ -6348,6 +6511,10 @@
             <a:prstDash val="solid"/>
           </a:ln>
         </p:spPr>
+        <p:txBody>
+          <a:bodyPr/>
+          <a:p/>
+        </p:txBody>
       </p:sp>
       <p:sp>
         <p:nvSpPr>
@@ -6451,6 +6618,10 @@
             <a:prstDash val="solid"/>
           </a:ln>
         </p:spPr>
+        <p:txBody>
+          <a:bodyPr/>
+          <a:p/>
+        </p:txBody>
       </p:sp>
       <p:sp>
         <p:nvSpPr>
@@ -6515,6 +6686,10 @@
             <a:prstDash val="solid"/>
           </a:ln>
         </p:spPr>
+        <p:txBody>
+          <a:bodyPr/>
+          <a:p/>
+        </p:txBody>
       </p:sp>
       <p:sp>
         <p:nvSpPr>
@@ -6579,6 +6754,10 @@
             <a:prstDash val="solid"/>
           </a:ln>
         </p:spPr>
+        <p:txBody>
+          <a:bodyPr/>
+          <a:p/>
+        </p:txBody>
       </p:sp>
       <p:sp>
         <p:nvSpPr>
@@ -6643,6 +6822,10 @@
             <a:prstDash val="solid"/>
           </a:ln>
         </p:spPr>
+        <p:txBody>
+          <a:bodyPr/>
+          <a:p/>
+        </p:txBody>
       </p:sp>
       <p:sp>
         <p:nvSpPr>
@@ -6746,6 +6929,10 @@
             <a:prstDash val="solid"/>
           </a:ln>
         </p:spPr>
+        <p:txBody>
+          <a:bodyPr/>
+          <a:p/>
+        </p:txBody>
       </p:sp>
       <p:sp>
         <p:nvSpPr>
@@ -6810,6 +6997,10 @@
             <a:prstDash val="solid"/>
           </a:ln>
         </p:spPr>
+        <p:txBody>
+          <a:bodyPr/>
+          <a:p/>
+        </p:txBody>
       </p:sp>
       <p:sp>
         <p:nvSpPr>
@@ -6874,6 +7065,10 @@
             <a:prstDash val="solid"/>
           </a:ln>
         </p:spPr>
+        <p:txBody>
+          <a:bodyPr/>
+          <a:p/>
+        </p:txBody>
       </p:sp>
       <p:sp>
         <p:nvSpPr>
@@ -6938,6 +7133,10 @@
             <a:prstDash val="solid"/>
           </a:ln>
         </p:spPr>
+        <p:txBody>
+          <a:bodyPr/>
+          <a:p/>
+        </p:txBody>
       </p:sp>
       <p:sp>
         <p:nvSpPr>
@@ -7299,6 +7498,10 @@
             </a:outerShdw>
           </a:effectLst>
         </p:spPr>
+        <p:txBody>
+          <a:bodyPr/>
+          <a:p/>
+        </p:txBody>
       </p:sp>
       <p:sp>
         <p:nvSpPr>
@@ -7324,6 +7527,10 @@
             <a:prstDash val="solid"/>
           </a:ln>
         </p:spPr>
+        <p:txBody>
+          <a:bodyPr/>
+          <a:p/>
+        </p:txBody>
       </p:sp>
       <p:sp>
         <p:nvSpPr>
@@ -7388,6 +7595,10 @@
             <a:prstDash val="solid"/>
           </a:ln>
         </p:spPr>
+        <p:txBody>
+          <a:bodyPr/>
+          <a:p/>
+        </p:txBody>
       </p:sp>
       <p:sp>
         <p:nvSpPr>
@@ -7500,6 +7711,10 @@
             </a:outerShdw>
           </a:effectLst>
         </p:spPr>
+        <p:txBody>
+          <a:bodyPr/>
+          <a:p/>
+        </p:txBody>
       </p:sp>
       <p:sp>
         <p:nvSpPr>
@@ -7525,6 +7740,10 @@
             <a:prstDash val="solid"/>
           </a:ln>
         </p:spPr>
+        <p:txBody>
+          <a:bodyPr/>
+          <a:p/>
+        </p:txBody>
       </p:sp>
       <p:sp>
         <p:nvSpPr>
@@ -7589,6 +7808,10 @@
             <a:prstDash val="solid"/>
           </a:ln>
         </p:spPr>
+        <p:txBody>
+          <a:bodyPr/>
+          <a:p/>
+        </p:txBody>
       </p:sp>
       <p:sp>
         <p:nvSpPr>
@@ -7771,6 +7994,10 @@
             <a:prstDash val="solid"/>
           </a:ln>
         </p:spPr>
+        <p:txBody>
+          <a:bodyPr/>
+          <a:p/>
+        </p:txBody>
       </p:sp>
       <p:sp>
         <p:nvSpPr>
@@ -7844,6 +8071,10 @@
             </a:outerShdw>
           </a:effectLst>
         </p:spPr>
+        <p:txBody>
+          <a:bodyPr/>
+          <a:p/>
+        </p:txBody>
       </p:sp>
       <p:sp>
         <p:nvSpPr>
@@ -7869,6 +8100,10 @@
             <a:prstDash val="solid"/>
           </a:ln>
         </p:spPr>
+        <p:txBody>
+          <a:bodyPr/>
+          <a:p/>
+        </p:txBody>
       </p:sp>
       <p:sp>
         <p:nvSpPr>
@@ -7933,6 +8168,10 @@
             <a:prstDash val="solid"/>
           </a:ln>
         </p:spPr>
+        <p:txBody>
+          <a:bodyPr/>
+          <a:p/>
+        </p:txBody>
       </p:sp>
       <p:sp>
         <p:nvSpPr>
@@ -8045,6 +8284,10 @@
             </a:outerShdw>
           </a:effectLst>
         </p:spPr>
+        <p:txBody>
+          <a:bodyPr/>
+          <a:p/>
+        </p:txBody>
       </p:sp>
       <p:sp>
         <p:nvSpPr>
@@ -8070,6 +8313,10 @@
             <a:prstDash val="solid"/>
           </a:ln>
         </p:spPr>
+        <p:txBody>
+          <a:bodyPr/>
+          <a:p/>
+        </p:txBody>
       </p:sp>
       <p:sp>
         <p:nvSpPr>
@@ -8134,6 +8381,10 @@
             <a:prstDash val="solid"/>
           </a:ln>
         </p:spPr>
+        <p:txBody>
+          <a:bodyPr/>
+          <a:p/>
+        </p:txBody>
       </p:sp>
       <p:sp>
         <p:nvSpPr>
@@ -8315,6 +8566,10 @@
           </a:solidFill>
           <a:ln/>
         </p:spPr>
+        <p:txBody>
+          <a:bodyPr/>
+          <a:p/>
+        </p:txBody>
       </p:sp>
       <p:sp>
         <p:nvSpPr>
@@ -8528,6 +8783,10 @@
             <a:prstDash val="solid"/>
           </a:ln>
         </p:spPr>
+        <p:txBody>
+          <a:bodyPr/>
+          <a:p/>
+        </p:txBody>
       </p:sp>
       <p:sp>
         <p:nvSpPr>
@@ -8592,6 +8851,10 @@
             <a:prstDash val="solid"/>
           </a:ln>
         </p:spPr>
+        <p:txBody>
+          <a:bodyPr/>
+          <a:p/>
+        </p:txBody>
       </p:sp>
       <p:sp>
         <p:nvSpPr>
@@ -8656,6 +8919,10 @@
             <a:prstDash val="solid"/>
           </a:ln>
         </p:spPr>
+        <p:txBody>
+          <a:bodyPr/>
+          <a:p/>
+        </p:txBody>
       </p:sp>
       <p:sp>
         <p:nvSpPr>
@@ -8720,6 +8987,10 @@
             <a:prstDash val="solid"/>
           </a:ln>
         </p:spPr>
+        <p:txBody>
+          <a:bodyPr/>
+          <a:p/>
+        </p:txBody>
       </p:sp>
       <p:sp>
         <p:nvSpPr>
@@ -8784,6 +9055,10 @@
             <a:prstDash val="solid"/>
           </a:ln>
         </p:spPr>
+        <p:txBody>
+          <a:bodyPr/>
+          <a:p/>
+        </p:txBody>
       </p:sp>
       <p:sp>
         <p:nvSpPr>
@@ -8848,6 +9123,10 @@
             <a:prstDash val="solid"/>
           </a:ln>
         </p:spPr>
+        <p:txBody>
+          <a:bodyPr/>
+          <a:p/>
+        </p:txBody>
       </p:sp>
       <p:sp>
         <p:nvSpPr>
@@ -8912,6 +9191,10 @@
             <a:prstDash val="solid"/>
           </a:ln>
         </p:spPr>
+        <p:txBody>
+          <a:bodyPr/>
+          <a:p/>
+        </p:txBody>
       </p:sp>
       <p:sp>
         <p:nvSpPr>
@@ -8976,6 +9259,10 @@
             <a:prstDash val="solid"/>
           </a:ln>
         </p:spPr>
+        <p:txBody>
+          <a:bodyPr/>
+          <a:p/>
+        </p:txBody>
       </p:sp>
       <p:sp>
         <p:nvSpPr>
@@ -9040,6 +9327,10 @@
             <a:prstDash val="solid"/>
           </a:ln>
         </p:spPr>
+        <p:txBody>
+          <a:bodyPr/>
+          <a:p/>
+        </p:txBody>
       </p:sp>
       <p:sp>
         <p:nvSpPr>
@@ -9104,6 +9395,10 @@
             <a:prstDash val="solid"/>
           </a:ln>
         </p:spPr>
+        <p:txBody>
+          <a:bodyPr/>
+          <a:p/>
+        </p:txBody>
       </p:sp>
       <p:sp>
         <p:nvSpPr>
@@ -9168,6 +9463,10 @@
             <a:prstDash val="solid"/>
           </a:ln>
         </p:spPr>
+        <p:txBody>
+          <a:bodyPr/>
+          <a:p/>
+        </p:txBody>
       </p:sp>
       <p:sp>
         <p:nvSpPr>
@@ -9232,6 +9531,10 @@
             <a:prstDash val="solid"/>
           </a:ln>
         </p:spPr>
+        <p:txBody>
+          <a:bodyPr/>
+          <a:p/>
+        </p:txBody>
       </p:sp>
       <p:sp>
         <p:nvSpPr>
@@ -9296,6 +9599,10 @@
             <a:prstDash val="solid"/>
           </a:ln>
         </p:spPr>
+        <p:txBody>
+          <a:bodyPr/>
+          <a:p/>
+        </p:txBody>
       </p:sp>
       <p:sp>
         <p:nvSpPr>
@@ -9360,6 +9667,10 @@
             <a:prstDash val="solid"/>
           </a:ln>
         </p:spPr>
+        <p:txBody>
+          <a:bodyPr/>
+          <a:p/>
+        </p:txBody>
       </p:sp>
       <p:sp>
         <p:nvSpPr>
@@ -9424,6 +9735,10 @@
             <a:prstDash val="solid"/>
           </a:ln>
         </p:spPr>
+        <p:txBody>
+          <a:bodyPr/>
+          <a:p/>
+        </p:txBody>
       </p:sp>
       <p:sp>
         <p:nvSpPr>
@@ -9488,6 +9803,10 @@
             <a:prstDash val="solid"/>
           </a:ln>
         </p:spPr>
+        <p:txBody>
+          <a:bodyPr/>
+          <a:p/>
+        </p:txBody>
       </p:sp>
       <p:sp>
         <p:nvSpPr>
@@ -9552,6 +9871,10 @@
             <a:prstDash val="solid"/>
           </a:ln>
         </p:spPr>
+        <p:txBody>
+          <a:bodyPr/>
+          <a:p/>
+        </p:txBody>
       </p:sp>
       <p:sp>
         <p:nvSpPr>
@@ -9616,6 +9939,10 @@
             <a:prstDash val="solid"/>
           </a:ln>
         </p:spPr>
+        <p:txBody>
+          <a:bodyPr/>
+          <a:p/>
+        </p:txBody>
       </p:sp>
       <p:sp>
         <p:nvSpPr>
@@ -9680,6 +10007,10 @@
             <a:prstDash val="solid"/>
           </a:ln>
         </p:spPr>
+        <p:txBody>
+          <a:bodyPr/>
+          <a:p/>
+        </p:txBody>
       </p:sp>
       <p:sp>
         <p:nvSpPr>
@@ -9744,6 +10075,10 @@
             <a:prstDash val="solid"/>
           </a:ln>
         </p:spPr>
+        <p:txBody>
+          <a:bodyPr/>
+          <a:p/>
+        </p:txBody>
       </p:sp>
       <p:sp>
         <p:nvSpPr>
@@ -9808,6 +10143,10 @@
             <a:prstDash val="solid"/>
           </a:ln>
         </p:spPr>
+        <p:txBody>
+          <a:bodyPr/>
+          <a:p/>
+        </p:txBody>
       </p:sp>
       <p:sp>
         <p:nvSpPr>
@@ -9872,6 +10211,10 @@
             <a:prstDash val="solid"/>
           </a:ln>
         </p:spPr>
+        <p:txBody>
+          <a:bodyPr/>
+          <a:p/>
+        </p:txBody>
       </p:sp>
       <p:sp>
         <p:nvSpPr>
@@ -9936,6 +10279,10 @@
             <a:prstDash val="solid"/>
           </a:ln>
         </p:spPr>
+        <p:txBody>
+          <a:bodyPr/>
+          <a:p/>
+        </p:txBody>
       </p:sp>
       <p:sp>
         <p:nvSpPr>
@@ -10000,6 +10347,10 @@
             <a:prstDash val="solid"/>
           </a:ln>
         </p:spPr>
+        <p:txBody>
+          <a:bodyPr/>
+          <a:p/>
+        </p:txBody>
       </p:sp>
       <p:sp>
         <p:nvSpPr>
@@ -10064,6 +10415,10 @@
             <a:prstDash val="solid"/>
           </a:ln>
         </p:spPr>
+        <p:txBody>
+          <a:bodyPr/>
+          <a:p/>
+        </p:txBody>
       </p:sp>
       <p:sp>
         <p:nvSpPr>
@@ -10128,6 +10483,10 @@
             <a:prstDash val="solid"/>
           </a:ln>
         </p:spPr>
+        <p:txBody>
+          <a:bodyPr/>
+          <a:p/>
+        </p:txBody>
       </p:sp>
       <p:sp>
         <p:nvSpPr>
@@ -10192,6 +10551,10 @@
             <a:prstDash val="solid"/>
           </a:ln>
         </p:spPr>
+        <p:txBody>
+          <a:bodyPr/>
+          <a:p/>
+        </p:txBody>
       </p:sp>
       <p:sp>
         <p:nvSpPr>
@@ -10256,6 +10619,10 @@
             <a:prstDash val="solid"/>
           </a:ln>
         </p:spPr>
+        <p:txBody>
+          <a:bodyPr/>
+          <a:p/>
+        </p:txBody>
       </p:sp>
       <p:sp>
         <p:nvSpPr>
@@ -10320,6 +10687,10 @@
             <a:prstDash val="solid"/>
           </a:ln>
         </p:spPr>
+        <p:txBody>
+          <a:bodyPr/>
+          <a:p/>
+        </p:txBody>
       </p:sp>
       <p:sp>
         <p:nvSpPr>
@@ -10384,6 +10755,10 @@
             <a:prstDash val="solid"/>
           </a:ln>
         </p:spPr>
+        <p:txBody>
+          <a:bodyPr/>
+          <a:p/>
+        </p:txBody>
       </p:sp>
       <p:sp>
         <p:nvSpPr>
@@ -10457,7 +10832,7 @@
                 <a:ea typeface="Calibri" pitchFamily="34" charset="-122"/>
                 <a:cs typeface="Calibri" pitchFamily="34" charset="-120"/>
               </a:rPr>
-              <a:t>* Múltiplos discos, desde que não sejam do mesmo par espelhado.  Quadro completo (9 níveis) no relatório em PDF, Tabela 2.</a:t>
+              <a:t>* Múltiplos discos, desde que não sejam do mesmo par espelhado.  Quadro completo corrigido no relatório, incluindo rebuild, leitura/escrita e relevância atual.</a:t>
             </a:r>
             <a:endParaRPr lang="en-US" sz="1100" dirty="0"/>
           </a:p>
@@ -10684,6 +11059,10 @@
             </a:outerShdw>
           </a:effectLst>
         </p:spPr>
+        <p:txBody>
+          <a:bodyPr/>
+          <a:p/>
+        </p:txBody>
       </p:sp>
       <p:sp>
         <p:nvSpPr>
@@ -10704,6 +11083,10 @@
           </a:solidFill>
           <a:ln/>
         </p:spPr>
+        <p:txBody>
+          <a:bodyPr/>
+          <a:p/>
+        </p:txBody>
       </p:sp>
       <p:sp>
         <p:nvSpPr>
@@ -10858,6 +11241,10 @@
             </a:outerShdw>
           </a:effectLst>
         </p:spPr>
+        <p:txBody>
+          <a:bodyPr/>
+          <a:p/>
+        </p:txBody>
       </p:sp>
       <p:sp>
         <p:nvSpPr>
@@ -10878,6 +11265,10 @@
           </a:solidFill>
           <a:ln/>
         </p:spPr>
+        <p:txBody>
+          <a:bodyPr/>
+          <a:p/>
+        </p:txBody>
       </p:sp>
       <p:sp>
         <p:nvSpPr>
@@ -11032,6 +11423,10 @@
             </a:outerShdw>
           </a:effectLst>
         </p:spPr>
+        <p:txBody>
+          <a:bodyPr/>
+          <a:p/>
+        </p:txBody>
       </p:sp>
       <p:sp>
         <p:nvSpPr>
@@ -11052,6 +11447,10 @@
           </a:solidFill>
           <a:ln/>
         </p:spPr>
+        <p:txBody>
+          <a:bodyPr/>
+          <a:p/>
+        </p:txBody>
       </p:sp>
       <p:sp>
         <p:nvSpPr>
@@ -11206,6 +11605,10 @@
             </a:outerShdw>
           </a:effectLst>
         </p:spPr>
+        <p:txBody>
+          <a:bodyPr/>
+          <a:p/>
+        </p:txBody>
       </p:sp>
       <p:sp>
         <p:nvSpPr>
@@ -11226,6 +11629,10 @@
           </a:solidFill>
           <a:ln/>
         </p:spPr>
+        <p:txBody>
+          <a:bodyPr/>
+          <a:p/>
+        </p:txBody>
       </p:sp>
       <p:sp>
         <p:nvSpPr>
@@ -11380,6 +11787,10 @@
             </a:outerShdw>
           </a:effectLst>
         </p:spPr>
+        <p:txBody>
+          <a:bodyPr/>
+          <a:p/>
+        </p:txBody>
       </p:sp>
       <p:sp>
         <p:nvSpPr>
@@ -11400,6 +11811,10 @@
           </a:solidFill>
           <a:ln/>
         </p:spPr>
+        <p:txBody>
+          <a:bodyPr/>
+          <a:p/>
+        </p:txBody>
       </p:sp>
       <p:sp>
         <p:nvSpPr>
@@ -11694,6 +12109,10 @@
             <a:prstDash val="solid"/>
           </a:ln>
         </p:spPr>
+        <p:txBody>
+          <a:bodyPr/>
+          <a:p/>
+        </p:txBody>
       </p:sp>
       <p:sp>
         <p:nvSpPr>
@@ -11758,6 +12177,10 @@
             <a:prstDash val="solid"/>
           </a:ln>
         </p:spPr>
+        <p:txBody>
+          <a:bodyPr/>
+          <a:p/>
+        </p:txBody>
       </p:sp>
       <p:sp>
         <p:nvSpPr>
@@ -11822,6 +12245,10 @@
             <a:prstDash val="solid"/>
           </a:ln>
         </p:spPr>
+        <p:txBody>
+          <a:bodyPr/>
+          <a:p/>
+        </p:txBody>
       </p:sp>
       <p:sp>
         <p:nvSpPr>
@@ -11886,6 +12313,10 @@
             <a:prstDash val="solid"/>
           </a:ln>
         </p:spPr>
+        <p:txBody>
+          <a:bodyPr/>
+          <a:p/>
+        </p:txBody>
       </p:sp>
       <p:sp>
         <p:nvSpPr>
@@ -11950,6 +12381,10 @@
             <a:prstDash val="solid"/>
           </a:ln>
         </p:spPr>
+        <p:txBody>
+          <a:bodyPr/>
+          <a:p/>
+        </p:txBody>
       </p:sp>
       <p:sp>
         <p:nvSpPr>
@@ -12014,6 +12449,10 @@
             <a:prstDash val="solid"/>
           </a:ln>
         </p:spPr>
+        <p:txBody>
+          <a:bodyPr/>
+          <a:p/>
+        </p:txBody>
       </p:sp>
       <p:sp>
         <p:nvSpPr>
@@ -12078,6 +12517,10 @@
             <a:prstDash val="solid"/>
           </a:ln>
         </p:spPr>
+        <p:txBody>
+          <a:bodyPr/>
+          <a:p/>
+        </p:txBody>
       </p:sp>
       <p:sp>
         <p:nvSpPr>
@@ -12142,6 +12585,10 @@
             <a:prstDash val="solid"/>
           </a:ln>
         </p:spPr>
+        <p:txBody>
+          <a:bodyPr/>
+          <a:p/>
+        </p:txBody>
       </p:sp>
       <p:sp>
         <p:nvSpPr>
@@ -12206,6 +12653,10 @@
             <a:prstDash val="solid"/>
           </a:ln>
         </p:spPr>
+        <p:txBody>
+          <a:bodyPr/>
+          <a:p/>
+        </p:txBody>
       </p:sp>
       <p:sp>
         <p:nvSpPr>
@@ -12270,6 +12721,10 @@
             <a:prstDash val="solid"/>
           </a:ln>
         </p:spPr>
+        <p:txBody>
+          <a:bodyPr/>
+          <a:p/>
+        </p:txBody>
       </p:sp>
       <p:sp>
         <p:nvSpPr>
@@ -12334,6 +12789,10 @@
             <a:prstDash val="solid"/>
           </a:ln>
         </p:spPr>
+        <p:txBody>
+          <a:bodyPr/>
+          <a:p/>
+        </p:txBody>
       </p:sp>
       <p:sp>
         <p:nvSpPr>
@@ -12398,6 +12857,10 @@
             <a:prstDash val="solid"/>
           </a:ln>
         </p:spPr>
+        <p:txBody>
+          <a:bodyPr/>
+          <a:p/>
+        </p:txBody>
       </p:sp>
       <p:sp>
         <p:nvSpPr>
@@ -12462,6 +12925,10 @@
             <a:prstDash val="solid"/>
           </a:ln>
         </p:spPr>
+        <p:txBody>
+          <a:bodyPr/>
+          <a:p/>
+        </p:txBody>
       </p:sp>
       <p:sp>
         <p:nvSpPr>
@@ -12526,6 +12993,10 @@
             <a:prstDash val="solid"/>
           </a:ln>
         </p:spPr>
+        <p:txBody>
+          <a:bodyPr/>
+          <a:p/>
+        </p:txBody>
       </p:sp>
       <p:sp>
         <p:nvSpPr>
@@ -12560,7 +13031,7 @@
                 <a:ea typeface="Calibri" pitchFamily="34" charset="-122"/>
                 <a:cs typeface="Calibri" pitchFamily="34" charset="-120"/>
               </a:rPr>
-              <a:t>RAID 6</a:t>
+              <a:t>Backup independente/versionado</a:t>
             </a:r>
             <a:endParaRPr lang="en-US" sz="1250" dirty="0"/>
           </a:p>
@@ -12590,6 +13061,10 @@
             <a:prstDash val="solid"/>
           </a:ln>
         </p:spPr>
+        <p:txBody>
+          <a:bodyPr/>
+          <a:p/>
+        </p:txBody>
       </p:sp>
       <p:sp>
         <p:nvSpPr>
@@ -12624,7 +13099,7 @@
                 <a:ea typeface="Calibri" pitchFamily="34" charset="-122"/>
                 <a:cs typeface="Calibri" pitchFamily="34" charset="-120"/>
               </a:rPr>
-              <a:t>SATA</a:t>
+              <a:t>RAID 6 só dá disponibilidade</a:t>
             </a:r>
             <a:endParaRPr lang="en-US" sz="1250" dirty="0"/>
           </a:p>
@@ -12654,6 +13129,10 @@
             <a:prstDash val="solid"/>
           </a:ln>
         </p:spPr>
+        <p:txBody>
+          <a:bodyPr/>
+          <a:p/>
+        </p:txBody>
       </p:sp>
       <p:sp>
         <p:nvSpPr>
@@ -12718,6 +13197,10 @@
             <a:prstDash val="solid"/>
           </a:ln>
         </p:spPr>
+        <p:txBody>
+          <a:bodyPr/>
+          <a:p/>
+        </p:txBody>
       </p:sp>
       <p:sp>
         <p:nvSpPr>
@@ -12752,7 +13235,7 @@
                 <a:ea typeface="Calibri" pitchFamily="34" charset="-122"/>
                 <a:cs typeface="Calibri" pitchFamily="34" charset="-120"/>
               </a:rPr>
-              <a:t>RAID 0</a:t>
+              <a:t>RAID 0 só se recriável no RTO</a:t>
             </a:r>
             <a:endParaRPr lang="en-US" sz="1250" dirty="0"/>
           </a:p>
@@ -12782,6 +13265,10 @@
             <a:prstDash val="solid"/>
           </a:ln>
         </p:spPr>
+        <p:txBody>
+          <a:bodyPr/>
+          <a:p/>
+        </p:txBody>
       </p:sp>
       <p:sp>
         <p:nvSpPr>
@@ -12846,6 +13333,10 @@
             <a:prstDash val="solid"/>
           </a:ln>
         </p:spPr>
+        <p:txBody>
+          <a:bodyPr/>
+          <a:p/>
+        </p:txBody>
       </p:sp>
       <p:sp>
         <p:nvSpPr>
@@ -12910,6 +13401,10 @@
             <a:prstDash val="solid"/>
           </a:ln>
         </p:spPr>
+        <p:txBody>
+          <a:bodyPr/>
+          <a:p/>
+        </p:txBody>
       </p:sp>
       <p:sp>
         <p:nvSpPr>
@@ -12974,6 +13469,10 @@
             <a:prstDash val="solid"/>
           </a:ln>
         </p:spPr>
+        <p:txBody>
+          <a:bodyPr/>
+          <a:p/>
+        </p:txBody>
       </p:sp>
       <p:sp>
         <p:nvSpPr>
@@ -13101,13 +13600,14 @@
 </file>
 
 <file path=ppt/slides/slide17.xml><?xml version="1.0" encoding="utf-8"?>
-<p:sld xmlns:a="http://schemas.openxmlformats.org/drawingml/2006/main" xmlns:r="http://schemas.openxmlformats.org/officeDocument/2006/relationships" xmlns:p="http://schemas.openxmlformats.org/presentationml/2006/main">
-  <p:cSld name="Slide 17">
+<p:sld xmlns:a="http://schemas.openxmlformats.org/drawingml/2006/main" xmlns:p="http://schemas.openxmlformats.org/presentationml/2006/main" xmlns:r="http://schemas.openxmlformats.org/officeDocument/2006/relationships">
+  <p:cSld>
     <p:bg>
       <p:bgPr>
         <a:solidFill>
-          <a:srgbClr val="1B263B"/>
+          <a:srgbClr val="F6F8FB"/>
         </a:solidFill>
+        <a:effectLst/>
       </p:bgPr>
     </p:bg>
     <p:spTree>
@@ -13116,498 +13616,235 @@
         <p:cNvGrpSpPr/>
         <p:nvPr/>
       </p:nvGrpSpPr>
-      <p:grpSpPr>
-        <a:xfrm>
-          <a:off x="0" y="0"/>
-          <a:ext cx="0" cy="0"/>
-          <a:chOff x="0" y="0"/>
-          <a:chExt cx="0" cy="0"/>
-        </a:xfrm>
-      </p:grpSpPr>
-      <p:sp>
-        <p:nvSpPr>
-          <p:cNvPr id="2" name="Shape 0"/>
-          <p:cNvSpPr/>
-          <p:nvPr/>
-        </p:nvSpPr>
-        <p:spPr>
-          <a:xfrm>
-            <a:off x="10241280" y="-1188720"/>
-            <a:ext cx="3108960" cy="3108960"/>
-          </a:xfrm>
-          <a:prstGeom prst="ellipse">
-            <a:avLst/>
-          </a:prstGeom>
-          <a:solidFill>
-            <a:srgbClr val="415A77">
-              <a:alpha val="40000"/>
-            </a:srgbClr>
-          </a:solidFill>
-          <a:ln/>
-        </p:spPr>
-      </p:sp>
-      <p:sp>
-        <p:nvSpPr>
-          <p:cNvPr id="3" name="Shape 1"/>
-          <p:cNvSpPr/>
-          <p:nvPr/>
-        </p:nvSpPr>
-        <p:spPr>
-          <a:xfrm>
-            <a:off x="11247120" y="182880"/>
-            <a:ext cx="1737360" cy="1737360"/>
-          </a:xfrm>
-          <a:prstGeom prst="ellipse">
-            <a:avLst/>
-          </a:prstGeom>
-          <a:solidFill>
-            <a:srgbClr val="E9C46A">
-              <a:alpha val="30000"/>
-            </a:srgbClr>
-          </a:solidFill>
-          <a:ln/>
-        </p:spPr>
-      </p:sp>
-      <p:sp>
-        <p:nvSpPr>
-          <p:cNvPr id="4" name="Text 2"/>
-          <p:cNvSpPr txBox="1"/>
-          <p:nvPr/>
-        </p:nvSpPr>
-        <p:spPr>
-          <a:xfrm>
-            <a:off x="640080" y="640080"/>
-            <a:ext cx="7315200" cy="640080"/>
-          </a:xfrm>
-          <a:prstGeom prst="rect">
-            <a:avLst/>
-          </a:prstGeom>
-          <a:noFill/>
-          <a:ln/>
-        </p:spPr>
-        <p:txBody>
-          <a:bodyPr wrap="square" rtlCol="0" anchor="ctr"/>
-          <a:lstStyle/>
-          <a:p>
-            <a:pPr indent="0" marL="0">
-              <a:buNone/>
-            </a:pPr>
-            <a:r>
-              <a:rPr lang="en-US" sz="3000" b="1" dirty="0">
-                <a:solidFill>
-                  <a:srgbClr val="FFFFFF"/>
-                </a:solidFill>
-                <a:latin typeface="Calibri" pitchFamily="34" charset="0"/>
-                <a:ea typeface="Calibri" pitchFamily="34" charset="-122"/>
-                <a:cs typeface="Calibri" pitchFamily="34" charset="-120"/>
-              </a:rPr>
-              <a:t>Conclusão</a:t>
-            </a:r>
-            <a:endParaRPr lang="en-US" sz="3000" dirty="0"/>
-          </a:p>
-        </p:txBody>
-      </p:sp>
-      <p:sp>
-        <p:nvSpPr>
-          <p:cNvPr id="5" name="Shape 3"/>
-          <p:cNvSpPr/>
-          <p:nvPr/>
-        </p:nvSpPr>
-        <p:spPr>
-          <a:xfrm>
-            <a:off x="731520" y="1737360"/>
-            <a:ext cx="384048" cy="384048"/>
-          </a:xfrm>
-          <a:prstGeom prst="ellipse">
-            <a:avLst/>
-          </a:prstGeom>
-          <a:solidFill>
-            <a:srgbClr val="E9C46A"/>
-          </a:solidFill>
-          <a:ln/>
-        </p:spPr>
-      </p:sp>
-      <p:sp>
-        <p:nvSpPr>
-          <p:cNvPr id="6" name="Text 4"/>
-          <p:cNvSpPr txBox="1"/>
-          <p:nvPr/>
-        </p:nvSpPr>
-        <p:spPr>
-          <a:xfrm>
-            <a:off x="731520" y="1737360"/>
-            <a:ext cx="384048" cy="384048"/>
-          </a:xfrm>
-          <a:prstGeom prst="rect">
-            <a:avLst/>
-          </a:prstGeom>
-          <a:noFill/>
-          <a:ln/>
-        </p:spPr>
-        <p:txBody>
-          <a:bodyPr wrap="square" rtlCol="0" anchor="ctr"/>
-          <a:lstStyle/>
-          <a:p>
-            <a:pPr algn="ctr" indent="0" marL="0">
-              <a:buNone/>
-            </a:pPr>
-            <a:r>
-              <a:rPr lang="en-US" sz="1400" b="1" dirty="0">
-                <a:solidFill>
-                  <a:srgbClr val="1B263B"/>
-                </a:solidFill>
-                <a:latin typeface="Calibri" pitchFamily="34" charset="0"/>
-                <a:ea typeface="Calibri" pitchFamily="34" charset="-122"/>
-                <a:cs typeface="Calibri" pitchFamily="34" charset="-120"/>
-              </a:rPr>
-              <a:t>1</a:t>
-            </a:r>
-            <a:endParaRPr lang="en-US" sz="1400" dirty="0"/>
-          </a:p>
-        </p:txBody>
-      </p:sp>
-      <p:sp>
-        <p:nvSpPr>
-          <p:cNvPr id="7" name="Text 5"/>
-          <p:cNvSpPr txBox="1"/>
-          <p:nvPr/>
-        </p:nvSpPr>
-        <p:spPr>
-          <a:xfrm>
-            <a:off x="1325880" y="1664208"/>
-            <a:ext cx="10058400" cy="960120"/>
-          </a:xfrm>
-          <a:prstGeom prst="rect">
-            <a:avLst/>
-          </a:prstGeom>
-          <a:noFill/>
-          <a:ln/>
-        </p:spPr>
-        <p:txBody>
-          <a:bodyPr wrap="square" rtlCol="0" anchor="ctr"/>
-          <a:lstStyle/>
-          <a:p>
-            <a:pPr indent="0" marL="0">
-              <a:lnSpc>
-                <a:spcPct val="115000"/>
-              </a:lnSpc>
-              <a:buNone/>
-            </a:pPr>
-            <a:r>
-              <a:rPr lang="en-US" sz="1500" dirty="0">
-                <a:solidFill>
-                  <a:srgbClr val="FFFFFF"/>
-                </a:solidFill>
-                <a:latin typeface="Calibri" pitchFamily="34" charset="0"/>
-                <a:ea typeface="Calibri" pitchFamily="34" charset="-122"/>
-                <a:cs typeface="Calibri" pitchFamily="34" charset="-120"/>
-              </a:rPr>
-              <a:t>A escolha de interface (SATA, eSATA, SAS, FireWire, USB, HBA) e de nível de RAID é uma decisão de arquitetura, não apenas de hardware.</a:t>
-            </a:r>
-            <a:endParaRPr lang="en-US" sz="1500" dirty="0"/>
-          </a:p>
-        </p:txBody>
-      </p:sp>
-      <p:sp>
-        <p:nvSpPr>
-          <p:cNvPr id="8" name="Shape 6"/>
-          <p:cNvSpPr/>
-          <p:nvPr/>
-        </p:nvSpPr>
-        <p:spPr>
-          <a:xfrm>
-            <a:off x="731520" y="2788920"/>
-            <a:ext cx="384048" cy="384048"/>
-          </a:xfrm>
-          <a:prstGeom prst="ellipse">
-            <a:avLst/>
-          </a:prstGeom>
-          <a:solidFill>
-            <a:srgbClr val="E9C46A"/>
-          </a:solidFill>
-          <a:ln/>
-        </p:spPr>
-      </p:sp>
-      <p:sp>
-        <p:nvSpPr>
-          <p:cNvPr id="9" name="Text 7"/>
-          <p:cNvSpPr txBox="1"/>
-          <p:nvPr/>
-        </p:nvSpPr>
-        <p:spPr>
-          <a:xfrm>
-            <a:off x="731520" y="2788920"/>
-            <a:ext cx="384048" cy="384048"/>
-          </a:xfrm>
-          <a:prstGeom prst="rect">
-            <a:avLst/>
-          </a:prstGeom>
-          <a:noFill/>
-          <a:ln/>
-        </p:spPr>
-        <p:txBody>
-          <a:bodyPr wrap="square" rtlCol="0" anchor="ctr"/>
-          <a:lstStyle/>
-          <a:p>
-            <a:pPr algn="ctr" indent="0" marL="0">
-              <a:buNone/>
-            </a:pPr>
-            <a:r>
-              <a:rPr lang="en-US" sz="1400" b="1" dirty="0">
-                <a:solidFill>
-                  <a:srgbClr val="1B263B"/>
-                </a:solidFill>
-                <a:latin typeface="Calibri" pitchFamily="34" charset="0"/>
-                <a:ea typeface="Calibri" pitchFamily="34" charset="-122"/>
-                <a:cs typeface="Calibri" pitchFamily="34" charset="-120"/>
-              </a:rPr>
-              <a:t>2</a:t>
-            </a:r>
-            <a:endParaRPr lang="en-US" sz="1400" dirty="0"/>
-          </a:p>
-        </p:txBody>
-      </p:sp>
-      <p:sp>
-        <p:nvSpPr>
-          <p:cNvPr id="10" name="Text 8"/>
-          <p:cNvSpPr txBox="1"/>
-          <p:nvPr/>
-        </p:nvSpPr>
-        <p:spPr>
-          <a:xfrm>
-            <a:off x="1325880" y="2715768"/>
-            <a:ext cx="10058400" cy="960120"/>
-          </a:xfrm>
-          <a:prstGeom prst="rect">
-            <a:avLst/>
-          </a:prstGeom>
-          <a:noFill/>
-          <a:ln/>
-        </p:spPr>
-        <p:txBody>
-          <a:bodyPr wrap="square" rtlCol="0" anchor="ctr"/>
-          <a:lstStyle/>
-          <a:p>
-            <a:pPr indent="0" marL="0">
-              <a:lnSpc>
-                <a:spcPct val="115000"/>
-              </a:lnSpc>
-              <a:buNone/>
-            </a:pPr>
-            <a:r>
-              <a:rPr lang="en-US" sz="1500" dirty="0">
-                <a:solidFill>
-                  <a:srgbClr val="FFFFFF"/>
-                </a:solidFill>
-                <a:latin typeface="Calibri" pitchFamily="34" charset="0"/>
-                <a:ea typeface="Calibri" pitchFamily="34" charset="-122"/>
-                <a:cs typeface="Calibri" pitchFamily="34" charset="-120"/>
-              </a:rPr>
-              <a:t>Paralelismo e redundância competem pelos mesmos discos: striping maximiza desempenho, mirroring/paridade sacrificam capacidade ou escrita por confiabilidade.</a:t>
-            </a:r>
-            <a:endParaRPr lang="en-US" sz="1500" dirty="0"/>
-          </a:p>
-        </p:txBody>
-      </p:sp>
-      <p:sp>
-        <p:nvSpPr>
-          <p:cNvPr id="11" name="Shape 9"/>
-          <p:cNvSpPr/>
-          <p:nvPr/>
-        </p:nvSpPr>
-        <p:spPr>
-          <a:xfrm>
-            <a:off x="731520" y="3840480"/>
-            <a:ext cx="384048" cy="384048"/>
-          </a:xfrm>
-          <a:prstGeom prst="ellipse">
-            <a:avLst/>
-          </a:prstGeom>
-          <a:solidFill>
-            <a:srgbClr val="E9C46A"/>
-          </a:solidFill>
-          <a:ln/>
-        </p:spPr>
-      </p:sp>
-      <p:sp>
-        <p:nvSpPr>
-          <p:cNvPr id="12" name="Text 10"/>
-          <p:cNvSpPr txBox="1"/>
-          <p:nvPr/>
-        </p:nvSpPr>
-        <p:spPr>
-          <a:xfrm>
-            <a:off x="731520" y="3840480"/>
-            <a:ext cx="384048" cy="384048"/>
-          </a:xfrm>
-          <a:prstGeom prst="rect">
-            <a:avLst/>
-          </a:prstGeom>
-          <a:noFill/>
-          <a:ln/>
-        </p:spPr>
-        <p:txBody>
-          <a:bodyPr wrap="square" rtlCol="0" anchor="ctr"/>
-          <a:lstStyle/>
-          <a:p>
-            <a:pPr algn="ctr" indent="0" marL="0">
-              <a:buNone/>
-            </a:pPr>
-            <a:r>
-              <a:rPr lang="en-US" sz="1400" b="1" dirty="0">
-                <a:solidFill>
-                  <a:srgbClr val="1B263B"/>
-                </a:solidFill>
-                <a:latin typeface="Calibri" pitchFamily="34" charset="0"/>
-                <a:ea typeface="Calibri" pitchFamily="34" charset="-122"/>
-                <a:cs typeface="Calibri" pitchFamily="34" charset="-120"/>
-              </a:rPr>
-              <a:t>3</a:t>
-            </a:r>
-            <a:endParaRPr lang="en-US" sz="1400" dirty="0"/>
-          </a:p>
-        </p:txBody>
-      </p:sp>
-      <p:sp>
-        <p:nvSpPr>
-          <p:cNvPr id="13" name="Text 11"/>
-          <p:cNvSpPr txBox="1"/>
-          <p:nvPr/>
-        </p:nvSpPr>
-        <p:spPr>
-          <a:xfrm>
-            <a:off x="1325880" y="3767328"/>
-            <a:ext cx="10058400" cy="960120"/>
-          </a:xfrm>
-          <a:prstGeom prst="rect">
-            <a:avLst/>
-          </a:prstGeom>
-          <a:noFill/>
-          <a:ln/>
-        </p:spPr>
-        <p:txBody>
-          <a:bodyPr wrap="square" rtlCol="0" anchor="ctr"/>
-          <a:lstStyle/>
-          <a:p>
-            <a:pPr indent="0" marL="0">
-              <a:lnSpc>
-                <a:spcPct val="115000"/>
-              </a:lnSpc>
-              <a:buNone/>
-            </a:pPr>
-            <a:r>
-              <a:rPr lang="en-US" sz="1500" dirty="0">
-                <a:solidFill>
-                  <a:srgbClr val="FFFFFF"/>
-                </a:solidFill>
-                <a:latin typeface="Calibri" pitchFamily="34" charset="0"/>
-                <a:ea typeface="Calibri" pitchFamily="34" charset="-122"/>
-                <a:cs typeface="Calibri" pitchFamily="34" charset="-120"/>
-              </a:rPr>
-              <a:t>MTTF, MTBF, MTTR e MTTDL permitem quantificar esse equilíbrio — e explicam a preferência crescente por RAID6 e RAID10 em discos de alta capacidade.</a:t>
-            </a:r>
-            <a:endParaRPr lang="en-US" sz="1500" dirty="0"/>
-          </a:p>
-        </p:txBody>
-      </p:sp>
-      <p:sp>
-        <p:nvSpPr>
-          <p:cNvPr id="14" name="Shape 12"/>
-          <p:cNvSpPr/>
-          <p:nvPr/>
-        </p:nvSpPr>
-        <p:spPr>
-          <a:xfrm>
-            <a:off x="731520" y="4892040"/>
-            <a:ext cx="384048" cy="384048"/>
-          </a:xfrm>
-          <a:prstGeom prst="ellipse">
-            <a:avLst/>
-          </a:prstGeom>
-          <a:solidFill>
-            <a:srgbClr val="E9C46A"/>
-          </a:solidFill>
-          <a:ln/>
-        </p:spPr>
-      </p:sp>
-      <p:sp>
-        <p:nvSpPr>
-          <p:cNvPr id="15" name="Text 13"/>
-          <p:cNvSpPr txBox="1"/>
-          <p:nvPr/>
-        </p:nvSpPr>
-        <p:spPr>
-          <a:xfrm>
-            <a:off x="731520" y="4892040"/>
-            <a:ext cx="384048" cy="384048"/>
-          </a:xfrm>
-          <a:prstGeom prst="rect">
-            <a:avLst/>
-          </a:prstGeom>
-          <a:noFill/>
-          <a:ln/>
-        </p:spPr>
-        <p:txBody>
-          <a:bodyPr wrap="square" rtlCol="0" anchor="ctr"/>
-          <a:lstStyle/>
-          <a:p>
-            <a:pPr algn="ctr" indent="0" marL="0">
-              <a:buNone/>
-            </a:pPr>
-            <a:r>
-              <a:rPr lang="en-US" sz="1400" b="1" dirty="0">
-                <a:solidFill>
-                  <a:srgbClr val="1B263B"/>
-                </a:solidFill>
-                <a:latin typeface="Calibri" pitchFamily="34" charset="0"/>
-                <a:ea typeface="Calibri" pitchFamily="34" charset="-122"/>
-                <a:cs typeface="Calibri" pitchFamily="34" charset="-120"/>
-              </a:rPr>
-              <a:t>4</a:t>
-            </a:r>
-            <a:endParaRPr lang="en-US" sz="1400" dirty="0"/>
-          </a:p>
-        </p:txBody>
-      </p:sp>
-      <p:sp>
-        <p:nvSpPr>
-          <p:cNvPr id="16" name="Text 14"/>
-          <p:cNvSpPr txBox="1"/>
-          <p:nvPr/>
-        </p:nvSpPr>
-        <p:spPr>
-          <a:xfrm>
-            <a:off x="1325880" y="4818888"/>
-            <a:ext cx="10058400" cy="960120"/>
-          </a:xfrm>
-          <a:prstGeom prst="rect">
-            <a:avLst/>
-          </a:prstGeom>
-          <a:noFill/>
-          <a:ln/>
-        </p:spPr>
-        <p:txBody>
-          <a:bodyPr wrap="square" rtlCol="0" anchor="ctr"/>
-          <a:lstStyle/>
-          <a:p>
-            <a:pPr indent="0" marL="0">
-              <a:lnSpc>
-                <a:spcPct val="115000"/>
-              </a:lnSpc>
-              <a:buNone/>
-            </a:pPr>
-            <a:r>
-              <a:rPr lang="en-US" sz="1500" dirty="0">
-                <a:solidFill>
-                  <a:srgbClr val="FFFFFF"/>
-                </a:solidFill>
-                <a:latin typeface="Calibri" pitchFamily="34" charset="0"/>
-                <a:ea typeface="Calibri" pitchFamily="34" charset="-122"/>
-                <a:cs typeface="Calibri" pitchFamily="34" charset="-120"/>
-              </a:rPr>
-              <a:t>Níveis não padrão (1.5, 7, DP, S, Matrix) mostram como fabricantes adaptam os conceitos acadêmicos às suas próprias arquiteturas.</a:t>
-            </a:r>
-            <a:endParaRPr lang="en-US" sz="1500" dirty="0"/>
+      <p:grpSpPr/>
+      <p:sp>
+        <p:nvSpPr>
+          <p:cNvPr id="2" name="TextBox 1"/>
+          <p:cNvSpPr txBox="1"/>
+          <p:nvPr/>
+        </p:nvSpPr>
+        <p:spPr>
+          <a:xfrm>
+            <a:off x="685800" y="411480"/>
+            <a:ext cx="10789920" cy="548640"/>
+          </a:xfrm>
+          <a:prstGeom prst="rect">
+            <a:avLst/>
+          </a:prstGeom>
+          <a:noFill/>
+        </p:spPr>
+        <p:txBody>
+          <a:bodyPr wrap="square">
+            <a:spAutoFit/>
+          </a:bodyPr>
+          <a:lstStyle/>
+          <a:p>
+            <a:pPr>
+              <a:defRPr sz="2600" b="1">
+                <a:solidFill>
+                  <a:srgbClr val="18243A"/>
+                </a:solidFill>
+                <a:latin typeface="Aptos"/>
+              </a:defRPr>
+            </a:pPr>
+            <a:r>
+              <a:t>Níveis históricos e diferença 0+1 × 10</a:t>
+            </a:r>
+          </a:p>
+        </p:txBody>
+      </p:sp>
+      <p:sp>
+        <p:nvSpPr>
+          <p:cNvPr id="3" name="TextBox 2"/>
+          <p:cNvSpPr txBox="1"/>
+          <p:nvPr/>
+        </p:nvSpPr>
+        <p:spPr>
+          <a:xfrm>
+            <a:off x="777240" y="1325880"/>
+            <a:ext cx="5120640" cy="365760"/>
+          </a:xfrm>
+          <a:prstGeom prst="rect">
+            <a:avLst/>
+          </a:prstGeom>
+          <a:noFill/>
+        </p:spPr>
+        <p:txBody>
+          <a:bodyPr wrap="square">
+            <a:spAutoFit/>
+          </a:bodyPr>
+          <a:lstStyle/>
+          <a:p>
+            <a:pPr>
+              <a:defRPr sz="1600" b="1">
+                <a:solidFill>
+                  <a:srgbClr val="C58D24"/>
+                </a:solidFill>
+                <a:latin typeface="Aptos"/>
+              </a:defRPr>
+            </a:pPr>
+            <a:r>
+              <a:t>RAID 2, 3 e 4</a:t>
+            </a:r>
+          </a:p>
+        </p:txBody>
+      </p:sp>
+      <p:sp>
+        <p:nvSpPr>
+          <p:cNvPr id="4" name="TextBox 3"/>
+          <p:cNvSpPr txBox="1"/>
+          <p:nvPr/>
+        </p:nvSpPr>
+        <p:spPr>
+          <a:xfrm>
+            <a:off x="777240" y="1737360"/>
+            <a:ext cx="5120640" cy="4297680"/>
+          </a:xfrm>
+          <a:prstGeom prst="rect">
+            <a:avLst/>
+          </a:prstGeom>
+          <a:noFill/>
+        </p:spPr>
+        <p:txBody>
+          <a:bodyPr wrap="square">
+            <a:spAutoFit/>
+          </a:bodyPr>
+          <a:lstStyle/>
+          <a:p>
+            <a:pPr>
+              <a:defRPr sz="1500" b="0">
+                <a:solidFill>
+                  <a:srgbClr val="18243A"/>
+                </a:solidFill>
+                <a:latin typeface="Aptos"/>
+              </a:defRPr>
+            </a:pPr>
+            <a:r>
+              <a:t>RAID 2: striping em bits + código Hamming; histórico e dependente da variante.</a:t>
+            </a:r>
+            <a:br/>
+            <a:br/>
+            <a:r>
+              <a:t>RAID 3: granularidade fina/byte + paridade dedicada; discos em lockstep.</a:t>
+            </a:r>
+            <a:br/>
+            <a:br/>
+            <a:r>
+              <a:t>RAID 4: blocos + paridade dedicada; leituras paralelas, gargalo na escrita.</a:t>
+            </a:r>
+          </a:p>
+        </p:txBody>
+      </p:sp>
+      <p:sp>
+        <p:nvSpPr>
+          <p:cNvPr id="5" name="TextBox 4"/>
+          <p:cNvSpPr txBox="1"/>
+          <p:nvPr/>
+        </p:nvSpPr>
+        <p:spPr>
+          <a:xfrm>
+            <a:off x="6263640" y="1325880"/>
+            <a:ext cx="5120640" cy="365760"/>
+          </a:xfrm>
+          <a:prstGeom prst="rect">
+            <a:avLst/>
+          </a:prstGeom>
+          <a:noFill/>
+        </p:spPr>
+        <p:txBody>
+          <a:bodyPr wrap="square">
+            <a:spAutoFit/>
+          </a:bodyPr>
+          <a:lstStyle/>
+          <a:p>
+            <a:pPr>
+              <a:defRPr sz="1600" b="1">
+                <a:solidFill>
+                  <a:srgbClr val="C58D24"/>
+                </a:solidFill>
+                <a:latin typeface="Aptos"/>
+              </a:defRPr>
+            </a:pPr>
+            <a:r>
+              <a:t>RAID 0+1 e RAID 10</a:t>
+            </a:r>
+          </a:p>
+        </p:txBody>
+      </p:sp>
+      <p:sp>
+        <p:nvSpPr>
+          <p:cNvPr id="6" name="TextBox 5"/>
+          <p:cNvSpPr txBox="1"/>
+          <p:nvPr/>
+        </p:nvSpPr>
+        <p:spPr>
+          <a:xfrm>
+            <a:off x="6263640" y="1737360"/>
+            <a:ext cx="5120640" cy="4297680"/>
+          </a:xfrm>
+          <a:prstGeom prst="rect">
+            <a:avLst/>
+          </a:prstGeom>
+          <a:noFill/>
+        </p:spPr>
+        <p:txBody>
+          <a:bodyPr wrap="square">
+            <a:spAutoFit/>
+          </a:bodyPr>
+          <a:lstStyle/>
+          <a:p>
+            <a:pPr>
+              <a:defRPr sz="1500" b="0">
+                <a:solidFill>
+                  <a:srgbClr val="18243A"/>
+                </a:solidFill>
+                <a:latin typeface="Aptos"/>
+              </a:defRPr>
+            </a:pPr>
+            <a:r>
+              <a:t>0+1 perde um stripe após a primeira falha; a tolerância adicional depende de onde falha o próximo disco.</a:t>
+            </a:r>
+            <a:br/>
+            <a:br/>
+            <a:r>
+              <a:t>RAID 10 expõe somente o par afetado; perde dados apenas se ambos os membros do mesmo par falharem.</a:t>
+            </a:r>
+          </a:p>
+        </p:txBody>
+      </p:sp>
+      <p:sp>
+        <p:nvSpPr>
+          <p:cNvPr id="7" name="TextBox 6"/>
+          <p:cNvSpPr txBox="1"/>
+          <p:nvPr/>
+        </p:nvSpPr>
+        <p:spPr>
+          <a:xfrm>
+            <a:off x="777240" y="6217920"/>
+            <a:ext cx="10607040" cy="274320"/>
+          </a:xfrm>
+          <a:prstGeom prst="rect">
+            <a:avLst/>
+          </a:prstGeom>
+          <a:noFill/>
+        </p:spPr>
+        <p:txBody>
+          <a:bodyPr wrap="square">
+            <a:spAutoFit/>
+          </a:bodyPr>
+          <a:lstStyle/>
+          <a:p>
+            <a:pPr>
+              <a:defRPr sz="1000" b="0">
+                <a:solidFill>
+                  <a:srgbClr val="667085"/>
+                </a:solidFill>
+                <a:latin typeface="Aptos"/>
+              </a:defRPr>
+            </a:pPr>
+            <a:r>
+              <a:t>Fontes e hipóteses completas no relatório corrigido.</a:t>
+            </a:r>
           </a:p>
         </p:txBody>
       </p:sp>
@@ -13620,13 +13857,14 @@
 </file>
 
 <file path=ppt/slides/slide18.xml><?xml version="1.0" encoding="utf-8"?>
-<p:sld xmlns:a="http://schemas.openxmlformats.org/drawingml/2006/main" xmlns:r="http://schemas.openxmlformats.org/officeDocument/2006/relationships" xmlns:p="http://schemas.openxmlformats.org/presentationml/2006/main">
-  <p:cSld name="Slide 18">
+<p:sld xmlns:a="http://schemas.openxmlformats.org/drawingml/2006/main" xmlns:p="http://schemas.openxmlformats.org/presentationml/2006/main" xmlns:r="http://schemas.openxmlformats.org/officeDocument/2006/relationships">
+  <p:cSld>
     <p:bg>
       <p:bgPr>
         <a:solidFill>
-          <a:srgbClr val="FFFFFF"/>
+          <a:srgbClr val="F6F8FB"/>
         </a:solidFill>
+        <a:effectLst/>
       </p:bgPr>
     </p:bg>
     <p:spTree>
@@ -13635,572 +13873,251 @@
         <p:cNvGrpSpPr/>
         <p:nvPr/>
       </p:nvGrpSpPr>
-      <p:grpSpPr>
-        <a:xfrm>
-          <a:off x="0" y="0"/>
-          <a:ext cx="0" cy="0"/>
-          <a:chOff x="0" y="0"/>
-          <a:chExt cx="0" cy="0"/>
-        </a:xfrm>
-      </p:grpSpPr>
-      <p:sp>
-        <p:nvSpPr>
-          <p:cNvPr id="2" name="Text 0"/>
-          <p:cNvSpPr txBox="1"/>
-          <p:nvPr/>
-        </p:nvSpPr>
-        <p:spPr>
-          <a:xfrm>
-            <a:off x="457200" y="320040"/>
-            <a:ext cx="11247120" cy="548640"/>
-          </a:xfrm>
-          <a:prstGeom prst="rect">
-            <a:avLst/>
-          </a:prstGeom>
-          <a:noFill/>
-          <a:ln/>
-        </p:spPr>
-        <p:txBody>
-          <a:bodyPr wrap="square" rtlCol="0" anchor="ctr"/>
-          <a:lstStyle/>
-          <a:p>
-            <a:pPr indent="0" marL="0">
-              <a:buNone/>
-            </a:pPr>
-            <a:r>
-              <a:rPr lang="en-US" sz="2600" b="1" dirty="0">
-                <a:solidFill>
-                  <a:srgbClr val="1B263B"/>
-                </a:solidFill>
-                <a:latin typeface="Calibri" pitchFamily="34" charset="0"/>
-                <a:ea typeface="Calibri" pitchFamily="34" charset="-122"/>
-                <a:cs typeface="Calibri" pitchFamily="34" charset="-120"/>
-              </a:rPr>
-              <a:t>Post-Mortem — Uso de IA Generativa</a:t>
-            </a:r>
-            <a:endParaRPr lang="en-US" sz="2600" dirty="0"/>
-          </a:p>
-        </p:txBody>
-      </p:sp>
-      <p:sp>
-        <p:nvSpPr>
-          <p:cNvPr id="3" name="Text 1"/>
-          <p:cNvSpPr txBox="1"/>
-          <p:nvPr/>
-        </p:nvSpPr>
-        <p:spPr>
-          <a:xfrm>
-            <a:off x="548640" y="1051560"/>
-            <a:ext cx="10972800" cy="365760"/>
-          </a:xfrm>
-          <a:prstGeom prst="rect">
-            <a:avLst/>
-          </a:prstGeom>
-          <a:noFill/>
-          <a:ln/>
-        </p:spPr>
-        <p:txBody>
-          <a:bodyPr wrap="square" rtlCol="0" anchor="ctr"/>
-          <a:lstStyle/>
-          <a:p>
-            <a:pPr indent="0" marL="0">
-              <a:buNone/>
-            </a:pPr>
-            <a:r>
-              <a:rPr lang="en-US" sz="1300" i="1" dirty="0">
-                <a:solidFill>
-                  <a:srgbClr val="5B6B79"/>
-                </a:solidFill>
-                <a:latin typeface="Calibri" pitchFamily="34" charset="0"/>
-                <a:ea typeface="Calibri" pitchFamily="34" charset="-122"/>
-                <a:cs typeface="Calibri" pitchFamily="34" charset="-120"/>
-              </a:rPr>
-              <a:t>Assistente utilizado: Claude (Anthropic)</a:t>
-            </a:r>
-            <a:endParaRPr lang="en-US" sz="1300" dirty="0"/>
-          </a:p>
-        </p:txBody>
-      </p:sp>
-      <p:sp>
-        <p:nvSpPr>
-          <p:cNvPr id="4" name="Shape 2"/>
-          <p:cNvSpPr/>
-          <p:nvPr/>
-        </p:nvSpPr>
-        <p:spPr>
-          <a:xfrm>
-            <a:off x="548640" y="1600200"/>
-            <a:ext cx="3520440" cy="4297680"/>
-          </a:xfrm>
-          <a:prstGeom prst="roundRect">
-            <a:avLst>
-              <a:gd name="adj" fmla="val 2078"/>
-            </a:avLst>
-          </a:prstGeom>
-          <a:solidFill>
-            <a:srgbClr val="FFFFFF"/>
-          </a:solidFill>
-          <a:ln w="12700">
-            <a:solidFill>
-              <a:srgbClr val="D8DEE4"/>
-            </a:solidFill>
-            <a:prstDash val="solid"/>
-          </a:ln>
-          <a:effectLst>
-            <a:outerShdw sx="100000" sy="100000" kx="0" ky="0" algn="bl" rotWithShape="0" blurRad="76200" dist="25400" dir="5400000">
-              <a:srgbClr val="1B263B">
-                <a:alpha val="12000"/>
-              </a:srgbClr>
-            </a:outerShdw>
-          </a:effectLst>
-        </p:spPr>
-      </p:sp>
-      <p:sp>
-        <p:nvSpPr>
-          <p:cNvPr id="5" name="Shape 3"/>
-          <p:cNvSpPr/>
-          <p:nvPr/>
-        </p:nvSpPr>
-        <p:spPr>
-          <a:xfrm>
-            <a:off x="548640" y="1600200"/>
-            <a:ext cx="3520440" cy="502920"/>
-          </a:xfrm>
-          <a:prstGeom prst="rect">
-            <a:avLst/>
-          </a:prstGeom>
-          <a:solidFill>
-            <a:srgbClr val="415A77"/>
-          </a:solidFill>
-          <a:ln/>
-        </p:spPr>
-      </p:sp>
-      <p:sp>
-        <p:nvSpPr>
-          <p:cNvPr id="6" name="Text 4"/>
-          <p:cNvSpPr txBox="1"/>
-          <p:nvPr/>
-        </p:nvSpPr>
-        <p:spPr>
-          <a:xfrm>
-            <a:off x="548640" y="1600200"/>
-            <a:ext cx="3520440" cy="502920"/>
-          </a:xfrm>
-          <a:prstGeom prst="rect">
-            <a:avLst/>
-          </a:prstGeom>
-          <a:noFill/>
-          <a:ln/>
-        </p:spPr>
-        <p:txBody>
-          <a:bodyPr wrap="square" rtlCol="0" anchor="ctr"/>
-          <a:lstStyle/>
-          <a:p>
-            <a:pPr algn="ctr" indent="0" marL="0">
-              <a:buNone/>
-            </a:pPr>
-            <a:r>
-              <a:rPr lang="en-US" sz="1500" b="1" dirty="0">
-                <a:solidFill>
-                  <a:srgbClr val="FFFFFF"/>
-                </a:solidFill>
-                <a:latin typeface="Calibri" pitchFamily="34" charset="0"/>
-                <a:ea typeface="Calibri" pitchFamily="34" charset="-122"/>
-                <a:cs typeface="Calibri" pitchFamily="34" charset="-120"/>
-              </a:rPr>
-              <a:t>Log de prompts</a:t>
-            </a:r>
-            <a:endParaRPr lang="en-US" sz="1500" dirty="0"/>
-          </a:p>
-        </p:txBody>
-      </p:sp>
-      <p:sp>
-        <p:nvSpPr>
-          <p:cNvPr id="7" name="Text 5"/>
-          <p:cNvSpPr txBox="1"/>
-          <p:nvPr/>
-        </p:nvSpPr>
-        <p:spPr>
-          <a:xfrm>
-            <a:off x="777240" y="2377440"/>
-            <a:ext cx="3063240" cy="3291840"/>
-          </a:xfrm>
-          <a:prstGeom prst="rect">
-            <a:avLst/>
-          </a:prstGeom>
-          <a:noFill/>
-          <a:ln/>
-        </p:spPr>
-        <p:txBody>
-          <a:bodyPr wrap="square" rtlCol="0" anchor="t"/>
-          <a:lstStyle/>
-          <a:p>
-            <a:pPr indent="0" marL="0">
-              <a:lnSpc>
-                <a:spcPct val="125000"/>
-              </a:lnSpc>
-              <a:buNone/>
-            </a:pPr>
-            <a:r>
-              <a:rPr lang="en-US" sz="1250" dirty="0">
-                <a:solidFill>
-                  <a:srgbClr val="1B263B"/>
-                </a:solidFill>
-                <a:latin typeface="Calibri" pitchFamily="34" charset="0"/>
-                <a:ea typeface="Calibri" pitchFamily="34" charset="-122"/>
-                <a:cs typeface="Calibri" pitchFamily="34" charset="-120"/>
-              </a:rPr>
-              <a:t>Registro cronológico dos prompts-chave: envio do enunciado, dos arquivos de referência da disciplina, pesquisa de especificações atuais (SAS-4, USB4 v2.0) e geração do relatório/slides.</a:t>
-            </a:r>
-            <a:endParaRPr lang="en-US" sz="1250" dirty="0"/>
-          </a:p>
-        </p:txBody>
-      </p:sp>
-      <p:sp>
-        <p:nvSpPr>
-          <p:cNvPr id="8" name="Shape 6"/>
-          <p:cNvSpPr/>
-          <p:nvPr/>
-        </p:nvSpPr>
-        <p:spPr>
-          <a:xfrm>
-            <a:off x="4389120" y="1600200"/>
-            <a:ext cx="3520440" cy="4297680"/>
-          </a:xfrm>
-          <a:prstGeom prst="roundRect">
-            <a:avLst>
-              <a:gd name="adj" fmla="val 2078"/>
-            </a:avLst>
-          </a:prstGeom>
-          <a:solidFill>
-            <a:srgbClr val="FFFFFF"/>
-          </a:solidFill>
-          <a:ln w="12700">
-            <a:solidFill>
-              <a:srgbClr val="D8DEE4"/>
-            </a:solidFill>
-            <a:prstDash val="solid"/>
-          </a:ln>
-          <a:effectLst>
-            <a:outerShdw sx="100000" sy="100000" kx="0" ky="0" algn="bl" rotWithShape="0" blurRad="76200" dist="25400" dir="5400000">
-              <a:srgbClr val="1B263B">
-                <a:alpha val="12000"/>
-              </a:srgbClr>
-            </a:outerShdw>
-          </a:effectLst>
-        </p:spPr>
-      </p:sp>
-      <p:sp>
-        <p:nvSpPr>
-          <p:cNvPr id="9" name="Shape 7"/>
-          <p:cNvSpPr/>
-          <p:nvPr/>
-        </p:nvSpPr>
-        <p:spPr>
-          <a:xfrm>
-            <a:off x="4389120" y="1600200"/>
-            <a:ext cx="3520440" cy="502920"/>
-          </a:xfrm>
-          <a:prstGeom prst="rect">
-            <a:avLst/>
-          </a:prstGeom>
-          <a:solidFill>
-            <a:srgbClr val="415A77"/>
-          </a:solidFill>
-          <a:ln/>
-        </p:spPr>
-      </p:sp>
-      <p:sp>
-        <p:nvSpPr>
-          <p:cNvPr id="10" name="Text 8"/>
-          <p:cNvSpPr txBox="1"/>
-          <p:nvPr/>
-        </p:nvSpPr>
-        <p:spPr>
-          <a:xfrm>
-            <a:off x="4389120" y="1600200"/>
-            <a:ext cx="3520440" cy="502920"/>
-          </a:xfrm>
-          <a:prstGeom prst="rect">
-            <a:avLst/>
-          </a:prstGeom>
-          <a:noFill/>
-          <a:ln/>
-        </p:spPr>
-        <p:txBody>
-          <a:bodyPr wrap="square" rtlCol="0" anchor="ctr"/>
-          <a:lstStyle/>
-          <a:p>
-            <a:pPr algn="ctr" indent="0" marL="0">
-              <a:buNone/>
-            </a:pPr>
-            <a:r>
-              <a:rPr lang="en-US" sz="1500" b="1" dirty="0">
-                <a:solidFill>
-                  <a:srgbClr val="FFFFFF"/>
-                </a:solidFill>
-                <a:latin typeface="Calibri" pitchFamily="34" charset="0"/>
-                <a:ea typeface="Calibri" pitchFamily="34" charset="-122"/>
-                <a:cs typeface="Calibri" pitchFamily="34" charset="-120"/>
-              </a:rPr>
-              <a:t>Autoria</a:t>
-            </a:r>
-            <a:endParaRPr lang="en-US" sz="1500" dirty="0"/>
-          </a:p>
-        </p:txBody>
-      </p:sp>
-      <p:sp>
-        <p:nvSpPr>
-          <p:cNvPr id="11" name="Text 9"/>
-          <p:cNvSpPr txBox="1"/>
-          <p:nvPr/>
-        </p:nvSpPr>
-        <p:spPr>
-          <a:xfrm>
-            <a:off x="4617720" y="2377440"/>
-            <a:ext cx="3063240" cy="3291840"/>
-          </a:xfrm>
-          <a:prstGeom prst="rect">
-            <a:avLst/>
-          </a:prstGeom>
-          <a:noFill/>
-          <a:ln/>
-        </p:spPr>
-        <p:txBody>
-          <a:bodyPr wrap="square" rtlCol="0" anchor="t"/>
-          <a:lstStyle/>
-          <a:p>
-            <a:pPr indent="0" marL="0">
-              <a:lnSpc>
-                <a:spcPct val="125000"/>
-              </a:lnSpc>
-              <a:buNone/>
-            </a:pPr>
-            <a:r>
-              <a:rPr lang="en-US" sz="1250" dirty="0">
-                <a:solidFill>
-                  <a:srgbClr val="1B263B"/>
-                </a:solidFill>
-                <a:latin typeface="Calibri" pitchFamily="34" charset="0"/>
-                <a:ea typeface="Calibri" pitchFamily="34" charset="-122"/>
-                <a:cs typeface="Calibri" pitchFamily="34" charset="-120"/>
-              </a:rPr>
-              <a:t>Cada integrante documenta o que fez, quais decisões tomou e por quê — detalhado nas Seções 12.3 e 12.4 do relatório em PDF.</a:t>
-            </a:r>
-            <a:endParaRPr lang="en-US" sz="1250" dirty="0"/>
-          </a:p>
-        </p:txBody>
-      </p:sp>
-      <p:sp>
-        <p:nvSpPr>
-          <p:cNvPr id="12" name="Shape 10"/>
-          <p:cNvSpPr/>
-          <p:nvPr/>
-        </p:nvSpPr>
-        <p:spPr>
-          <a:xfrm>
-            <a:off x="8229600" y="1600200"/>
-            <a:ext cx="3520440" cy="4297680"/>
-          </a:xfrm>
-          <a:prstGeom prst="roundRect">
-            <a:avLst>
-              <a:gd name="adj" fmla="val 2078"/>
-            </a:avLst>
-          </a:prstGeom>
-          <a:solidFill>
-            <a:srgbClr val="FFFFFF"/>
-          </a:solidFill>
-          <a:ln w="12700">
-            <a:solidFill>
-              <a:srgbClr val="D8DEE4"/>
-            </a:solidFill>
-            <a:prstDash val="solid"/>
-          </a:ln>
-          <a:effectLst>
-            <a:outerShdw sx="100000" sy="100000" kx="0" ky="0" algn="bl" rotWithShape="0" blurRad="76200" dist="25400" dir="5400000">
-              <a:srgbClr val="1B263B">
-                <a:alpha val="12000"/>
-              </a:srgbClr>
-            </a:outerShdw>
-          </a:effectLst>
-        </p:spPr>
-      </p:sp>
-      <p:sp>
-        <p:nvSpPr>
-          <p:cNvPr id="13" name="Shape 11"/>
-          <p:cNvSpPr/>
-          <p:nvPr/>
-        </p:nvSpPr>
-        <p:spPr>
-          <a:xfrm>
-            <a:off x="8229600" y="1600200"/>
-            <a:ext cx="3520440" cy="502920"/>
-          </a:xfrm>
-          <a:prstGeom prst="rect">
-            <a:avLst/>
-          </a:prstGeom>
-          <a:solidFill>
-            <a:srgbClr val="415A77"/>
-          </a:solidFill>
-          <a:ln/>
-        </p:spPr>
-      </p:sp>
-      <p:sp>
-        <p:nvSpPr>
-          <p:cNvPr id="14" name="Text 12"/>
-          <p:cNvSpPr txBox="1"/>
-          <p:nvPr/>
-        </p:nvSpPr>
-        <p:spPr>
-          <a:xfrm>
-            <a:off x="8229600" y="1600200"/>
-            <a:ext cx="3520440" cy="502920"/>
-          </a:xfrm>
-          <a:prstGeom prst="rect">
-            <a:avLst/>
-          </a:prstGeom>
-          <a:noFill/>
-          <a:ln/>
-        </p:spPr>
-        <p:txBody>
-          <a:bodyPr wrap="square" rtlCol="0" anchor="ctr"/>
-          <a:lstStyle/>
-          <a:p>
-            <a:pPr algn="ctr" indent="0" marL="0">
-              <a:buNone/>
-            </a:pPr>
-            <a:r>
-              <a:rPr lang="en-US" sz="1500" b="1" dirty="0">
-                <a:solidFill>
-                  <a:srgbClr val="FFFFFF"/>
-                </a:solidFill>
-                <a:latin typeface="Calibri" pitchFamily="34" charset="0"/>
-                <a:ea typeface="Calibri" pitchFamily="34" charset="-122"/>
-                <a:cs typeface="Calibri" pitchFamily="34" charset="-120"/>
-              </a:rPr>
-              <a:t>Erros corrigidos</a:t>
-            </a:r>
-            <a:endParaRPr lang="en-US" sz="1500" dirty="0"/>
-          </a:p>
-        </p:txBody>
-      </p:sp>
-      <p:sp>
-        <p:nvSpPr>
-          <p:cNvPr id="15" name="Text 13"/>
-          <p:cNvSpPr txBox="1"/>
-          <p:nvPr/>
-        </p:nvSpPr>
-        <p:spPr>
-          <a:xfrm>
-            <a:off x="8458200" y="2377440"/>
-            <a:ext cx="3063240" cy="3291840"/>
-          </a:xfrm>
-          <a:prstGeom prst="rect">
-            <a:avLst/>
-          </a:prstGeom>
-          <a:noFill/>
-          <a:ln/>
-        </p:spPr>
-        <p:txBody>
-          <a:bodyPr wrap="square" rtlCol="0" anchor="t"/>
-          <a:lstStyle/>
-          <a:p>
-            <a:pPr indent="0" marL="0">
-              <a:lnSpc>
-                <a:spcPct val="125000"/>
-              </a:lnSpc>
-              <a:buNone/>
-            </a:pPr>
-            <a:r>
-              <a:rPr lang="en-US" sz="1250" dirty="0">
-                <a:solidFill>
-                  <a:srgbClr val="1B263B"/>
-                </a:solidFill>
-                <a:latin typeface="Calibri" pitchFamily="34" charset="0"/>
-                <a:ea typeface="Calibri" pitchFamily="34" charset="-122"/>
-                <a:cs typeface="Calibri" pitchFamily="34" charset="-120"/>
-              </a:rPr>
-              <a:t>Velocidades de interface verificadas via pesquisa web (não só memória do modelo); distinção formal MTTF x MTBF explicitada; níveis não padrão marcados como proprietários.</a:t>
-            </a:r>
-            <a:endParaRPr lang="en-US" sz="1250" dirty="0"/>
-          </a:p>
-        </p:txBody>
-      </p:sp>
-      <p:sp>
-        <p:nvSpPr>
-          <p:cNvPr id="16" name="Text 14"/>
-          <p:cNvSpPr txBox="1"/>
-          <p:nvPr/>
-        </p:nvSpPr>
-        <p:spPr>
-          <a:xfrm>
-            <a:off x="457200" y="6528816"/>
-            <a:ext cx="8229600" cy="274320"/>
-          </a:xfrm>
-          <a:prstGeom prst="rect">
-            <a:avLst/>
-          </a:prstGeom>
-          <a:noFill/>
-          <a:ln/>
-        </p:spPr>
-        <p:txBody>
-          <a:bodyPr wrap="square" rtlCol="0" anchor="ctr"/>
-          <a:lstStyle/>
-          <a:p>
-            <a:pPr indent="0" marL="0">
-              <a:buNone/>
-            </a:pPr>
-            <a:r>
-              <a:rPr lang="en-US" sz="900" dirty="0">
-                <a:solidFill>
-                  <a:srgbClr val="5B6B79"/>
-                </a:solidFill>
-                <a:latin typeface="Calibri" pitchFamily="34" charset="0"/>
-                <a:ea typeface="Calibri" pitchFamily="34" charset="-122"/>
-                <a:cs typeface="Calibri" pitchFamily="34" charset="-120"/>
-              </a:rPr>
-              <a:t>Armazenamento DAS e RAID para SBD — UFRJ</a:t>
-            </a:r>
-            <a:endParaRPr lang="en-US" sz="900" dirty="0"/>
-          </a:p>
-        </p:txBody>
-      </p:sp>
-      <p:sp>
-        <p:nvSpPr>
-          <p:cNvPr id="17" name="Text 15"/>
-          <p:cNvSpPr txBox="1"/>
-          <p:nvPr/>
-        </p:nvSpPr>
-        <p:spPr>
-          <a:xfrm>
-            <a:off x="11338560" y="6528816"/>
-            <a:ext cx="365760" cy="274320"/>
-          </a:xfrm>
-          <a:prstGeom prst="rect">
-            <a:avLst/>
-          </a:prstGeom>
-          <a:noFill/>
-          <a:ln/>
-        </p:spPr>
-        <p:txBody>
-          <a:bodyPr wrap="square" rtlCol="0" anchor="ctr"/>
-          <a:lstStyle/>
-          <a:p>
-            <a:pPr algn="r" indent="0" marL="0">
-              <a:buNone/>
-            </a:pPr>
-            <a:r>
-              <a:rPr lang="en-US" sz="900" dirty="0">
-                <a:solidFill>
-                  <a:srgbClr val="5B6B79"/>
-                </a:solidFill>
-                <a:latin typeface="Calibri" pitchFamily="34" charset="0"/>
-                <a:ea typeface="Calibri" pitchFamily="34" charset="-122"/>
-                <a:cs typeface="Calibri" pitchFamily="34" charset="-120"/>
-              </a:rPr>
-              <a:t>18</a:t>
-            </a:r>
-            <a:endParaRPr lang="en-US" sz="900" dirty="0"/>
+      <p:grpSpPr/>
+      <p:sp>
+        <p:nvSpPr>
+          <p:cNvPr id="2" name="TextBox 1"/>
+          <p:cNvSpPr txBox="1"/>
+          <p:nvPr/>
+        </p:nvSpPr>
+        <p:spPr>
+          <a:xfrm>
+            <a:off x="685800" y="411480"/>
+            <a:ext cx="10789920" cy="548640"/>
+          </a:xfrm>
+          <a:prstGeom prst="rect">
+            <a:avLst/>
+          </a:prstGeom>
+          <a:noFill/>
+        </p:spPr>
+        <p:txBody>
+          <a:bodyPr wrap="square">
+            <a:spAutoFit/>
+          </a:bodyPr>
+          <a:lstStyle/>
+          <a:p>
+            <a:pPr>
+              <a:defRPr sz="2600" b="1">
+                <a:solidFill>
+                  <a:srgbClr val="18243A"/>
+                </a:solidFill>
+                <a:latin typeface="Aptos"/>
+              </a:defRPr>
+            </a:pPr>
+            <a:r>
+              <a:t>Confiabilidade: hipótese antes da fórmula</a:t>
+            </a:r>
+          </a:p>
+        </p:txBody>
+      </p:sp>
+      <p:sp>
+        <p:nvSpPr>
+          <p:cNvPr id="3" name="TextBox 2"/>
+          <p:cNvSpPr txBox="1"/>
+          <p:nvPr/>
+        </p:nvSpPr>
+        <p:spPr>
+          <a:xfrm>
+            <a:off x="777240" y="1325880"/>
+            <a:ext cx="5120640" cy="365760"/>
+          </a:xfrm>
+          <a:prstGeom prst="rect">
+            <a:avLst/>
+          </a:prstGeom>
+          <a:noFill/>
+        </p:spPr>
+        <p:txBody>
+          <a:bodyPr wrap="square">
+            <a:spAutoFit/>
+          </a:bodyPr>
+          <a:lstStyle/>
+          <a:p>
+            <a:pPr>
+              <a:defRPr sz="1600" b="1">
+                <a:solidFill>
+                  <a:srgbClr val="C58D24"/>
+                </a:solidFill>
+                <a:latin typeface="Aptos"/>
+              </a:defRPr>
+            </a:pPr>
+            <a:r>
+              <a:t>O que o MTTDL simplificado assume</a:t>
+            </a:r>
+          </a:p>
+        </p:txBody>
+      </p:sp>
+      <p:sp>
+        <p:nvSpPr>
+          <p:cNvPr id="4" name="TextBox 3"/>
+          <p:cNvSpPr txBox="1"/>
+          <p:nvPr/>
+        </p:nvSpPr>
+        <p:spPr>
+          <a:xfrm>
+            <a:off x="777240" y="1737360"/>
+            <a:ext cx="5120640" cy="4297680"/>
+          </a:xfrm>
+          <a:prstGeom prst="rect">
+            <a:avLst/>
+          </a:prstGeom>
+          <a:noFill/>
+        </p:spPr>
+        <p:txBody>
+          <a:bodyPr wrap="square">
+            <a:spAutoFit/>
+          </a:bodyPr>
+          <a:lstStyle/>
+          <a:p>
+            <a:pPr>
+              <a:defRPr sz="1500" b="0">
+                <a:solidFill>
+                  <a:srgbClr val="18243A"/>
+                </a:solidFill>
+                <a:latin typeface="Aptos"/>
+              </a:defRPr>
+            </a:pPr>
+            <a:r>
+              <a:t>• Discos idênticos</a:t>
+            </a:r>
+            <a:br/>
+            <a:r>
+              <a:t>• Falhas independentes/exponenciais</a:t>
+            </a:r>
+            <a:br/>
+            <a:r>
+              <a:t>• Detecção imediata</a:t>
+            </a:r>
+            <a:br/>
+            <a:r>
+              <a:t>• Reparo perfeito</a:t>
+            </a:r>
+            <a:br/>
+            <a:r>
+              <a:t>• Unidades consistentes</a:t>
+            </a:r>
+            <a:br/>
+            <a:br/>
+            <a:r>
+              <a:t>Não cobre URE, setores latentes, correlação nem carga de rebuild.</a:t>
+            </a:r>
+          </a:p>
+        </p:txBody>
+      </p:sp>
+      <p:sp>
+        <p:nvSpPr>
+          <p:cNvPr id="5" name="TextBox 4"/>
+          <p:cNvSpPr txBox="1"/>
+          <p:nvPr/>
+        </p:nvSpPr>
+        <p:spPr>
+          <a:xfrm>
+            <a:off x="6263640" y="1325880"/>
+            <a:ext cx="5120640" cy="365760"/>
+          </a:xfrm>
+          <a:prstGeom prst="rect">
+            <a:avLst/>
+          </a:prstGeom>
+          <a:noFill/>
+        </p:spPr>
+        <p:txBody>
+          <a:bodyPr wrap="square">
+            <a:spAutoFit/>
+          </a:bodyPr>
+          <a:lstStyle/>
+          <a:p>
+            <a:pPr>
+              <a:defRPr sz="1600" b="1">
+                <a:solidFill>
+                  <a:srgbClr val="C58D24"/>
+                </a:solidFill>
+                <a:latin typeface="Aptos"/>
+              </a:defRPr>
+            </a:pPr>
+            <a:r>
+              <a:t>Métrica complementar</a:t>
+            </a:r>
+          </a:p>
+        </p:txBody>
+      </p:sp>
+      <p:sp>
+        <p:nvSpPr>
+          <p:cNvPr id="6" name="TextBox 5"/>
+          <p:cNvSpPr txBox="1"/>
+          <p:nvPr/>
+        </p:nvSpPr>
+        <p:spPr>
+          <a:xfrm>
+            <a:off x="6263640" y="1737360"/>
+            <a:ext cx="5120640" cy="4297680"/>
+          </a:xfrm>
+          <a:prstGeom prst="rect">
+            <a:avLst/>
+          </a:prstGeom>
+          <a:noFill/>
+        </p:spPr>
+        <p:txBody>
+          <a:bodyPr wrap="square">
+            <a:spAutoFit/>
+          </a:bodyPr>
+          <a:lstStyle/>
+          <a:p>
+            <a:pPr>
+              <a:defRPr sz="1500" b="0">
+                <a:solidFill>
+                  <a:srgbClr val="18243A"/>
+                </a:solidFill>
+                <a:latin typeface="Aptos"/>
+              </a:defRPr>
+            </a:pPr>
+            <a:r>
+              <a:t>Disponibilidade: A = MTTF/(MTTF + MTTR)</a:t>
+            </a:r>
+            <a:br/>
+            <a:br/>
+            <a:r>
+              <a:t>Exemplo: 1.000.000 h e MTTR 24 h → 99,9976%.</a:t>
+            </a:r>
+            <a:br/>
+            <a:br/>
+            <a:r>
+              <a:t>Valor médio não é garantia. Dimensionar com RPO/RTO e teste de falha.</a:t>
+            </a:r>
+          </a:p>
+        </p:txBody>
+      </p:sp>
+      <p:sp>
+        <p:nvSpPr>
+          <p:cNvPr id="7" name="TextBox 6"/>
+          <p:cNvSpPr txBox="1"/>
+          <p:nvPr/>
+        </p:nvSpPr>
+        <p:spPr>
+          <a:xfrm>
+            <a:off x="777240" y="6217920"/>
+            <a:ext cx="10607040" cy="274320"/>
+          </a:xfrm>
+          <a:prstGeom prst="rect">
+            <a:avLst/>
+          </a:prstGeom>
+          <a:noFill/>
+        </p:spPr>
+        <p:txBody>
+          <a:bodyPr wrap="square">
+            <a:spAutoFit/>
+          </a:bodyPr>
+          <a:lstStyle/>
+          <a:p>
+            <a:pPr>
+              <a:defRPr sz="1000" b="0">
+                <a:solidFill>
+                  <a:srgbClr val="667085"/>
+                </a:solidFill>
+                <a:latin typeface="Aptos"/>
+              </a:defRPr>
+            </a:pPr>
+            <a:r>
+              <a:t>Fontes e hipóteses completas no relatório corrigido.</a:t>
+            </a:r>
           </a:p>
         </p:txBody>
       </p:sp>
@@ -14213,13 +14130,14 @@
 </file>
 
 <file path=ppt/slides/slide19.xml><?xml version="1.0" encoding="utf-8"?>
-<p:sld xmlns:a="http://schemas.openxmlformats.org/drawingml/2006/main" xmlns:r="http://schemas.openxmlformats.org/officeDocument/2006/relationships" xmlns:p="http://schemas.openxmlformats.org/presentationml/2006/main">
-  <p:cSld name="Slide 19">
+<p:sld xmlns:a="http://schemas.openxmlformats.org/drawingml/2006/main" xmlns:p="http://schemas.openxmlformats.org/presentationml/2006/main" xmlns:r="http://schemas.openxmlformats.org/officeDocument/2006/relationships">
+  <p:cSld>
     <p:bg>
       <p:bgPr>
         <a:solidFill>
-          <a:srgbClr val="1B263B"/>
+          <a:srgbClr val="F6F8FB"/>
         </a:solidFill>
+        <a:effectLst/>
       </p:bgPr>
     </p:bg>
     <p:spTree>
@@ -14228,172 +14146,252 @@
         <p:cNvGrpSpPr/>
         <p:nvPr/>
       </p:nvGrpSpPr>
-      <p:grpSpPr>
-        <a:xfrm>
-          <a:off x="0" y="0"/>
-          <a:ext cx="0" cy="0"/>
-          <a:chOff x="0" y="0"/>
-          <a:chExt cx="0" cy="0"/>
-        </a:xfrm>
-      </p:grpSpPr>
-      <p:sp>
-        <p:nvSpPr>
-          <p:cNvPr id="2" name="Shape 0"/>
-          <p:cNvSpPr/>
-          <p:nvPr/>
-        </p:nvSpPr>
-        <p:spPr>
-          <a:xfrm>
-            <a:off x="10241280" y="-1188720"/>
-            <a:ext cx="3108960" cy="3108960"/>
-          </a:xfrm>
-          <a:prstGeom prst="ellipse">
-            <a:avLst/>
-          </a:prstGeom>
-          <a:solidFill>
-            <a:srgbClr val="415A77">
-              <a:alpha val="40000"/>
-            </a:srgbClr>
-          </a:solidFill>
-          <a:ln/>
-        </p:spPr>
-      </p:sp>
-      <p:sp>
-        <p:nvSpPr>
-          <p:cNvPr id="3" name="Shape 1"/>
-          <p:cNvSpPr/>
-          <p:nvPr/>
-        </p:nvSpPr>
-        <p:spPr>
-          <a:xfrm>
-            <a:off x="11247120" y="182880"/>
-            <a:ext cx="1737360" cy="1737360"/>
-          </a:xfrm>
-          <a:prstGeom prst="ellipse">
-            <a:avLst/>
-          </a:prstGeom>
-          <a:solidFill>
-            <a:srgbClr val="E9C46A">
-              <a:alpha val="30000"/>
-            </a:srgbClr>
-          </a:solidFill>
-          <a:ln/>
-        </p:spPr>
-      </p:sp>
-      <p:sp>
-        <p:nvSpPr>
-          <p:cNvPr id="4" name="Text 2"/>
-          <p:cNvSpPr txBox="1"/>
-          <p:nvPr/>
-        </p:nvSpPr>
-        <p:spPr>
-          <a:xfrm>
-            <a:off x="640080" y="2743200"/>
-            <a:ext cx="7315200" cy="731520"/>
-          </a:xfrm>
-          <a:prstGeom prst="rect">
-            <a:avLst/>
-          </a:prstGeom>
-          <a:noFill/>
-          <a:ln/>
-        </p:spPr>
-        <p:txBody>
-          <a:bodyPr wrap="square" rtlCol="0" anchor="ctr"/>
-          <a:lstStyle/>
-          <a:p>
-            <a:pPr indent="0" marL="0">
-              <a:buNone/>
-            </a:pPr>
-            <a:r>
-              <a:rPr lang="en-US" sz="3600" b="1" dirty="0">
-                <a:solidFill>
-                  <a:srgbClr val="FFFFFF"/>
-                </a:solidFill>
-                <a:latin typeface="Calibri" pitchFamily="34" charset="0"/>
-                <a:ea typeface="Calibri" pitchFamily="34" charset="-122"/>
-                <a:cs typeface="Calibri" pitchFamily="34" charset="-120"/>
-              </a:rPr>
-              <a:t>Obrigado!</a:t>
-            </a:r>
-            <a:endParaRPr lang="en-US" sz="3600" dirty="0"/>
-          </a:p>
-        </p:txBody>
-      </p:sp>
-      <p:sp>
-        <p:nvSpPr>
-          <p:cNvPr id="5" name="Text 3"/>
-          <p:cNvSpPr txBox="1"/>
-          <p:nvPr/>
-        </p:nvSpPr>
-        <p:spPr>
-          <a:xfrm>
-            <a:off x="640080" y="3429000"/>
-            <a:ext cx="7315200" cy="457200"/>
-          </a:xfrm>
-          <a:prstGeom prst="rect">
-            <a:avLst/>
-          </a:prstGeom>
-          <a:noFill/>
-          <a:ln/>
-        </p:spPr>
-        <p:txBody>
-          <a:bodyPr wrap="square" rtlCol="0" anchor="ctr"/>
-          <a:lstStyle/>
-          <a:p>
-            <a:pPr indent="0" marL="0">
-              <a:buNone/>
-            </a:pPr>
-            <a:r>
-              <a:rPr lang="en-US" sz="1800" i="1" dirty="0">
-                <a:solidFill>
-                  <a:srgbClr val="E9C46A"/>
-                </a:solidFill>
-                <a:latin typeface="Calibri" pitchFamily="34" charset="0"/>
-                <a:ea typeface="Calibri" pitchFamily="34" charset="-122"/>
-                <a:cs typeface="Calibri" pitchFamily="34" charset="-120"/>
-              </a:rPr>
-              <a:t>Perguntas e debate</a:t>
-            </a:r>
-            <a:endParaRPr lang="en-US" sz="1800" dirty="0"/>
-          </a:p>
-        </p:txBody>
-      </p:sp>
-      <p:sp>
-        <p:nvSpPr>
-          <p:cNvPr id="6" name="Text 4"/>
-          <p:cNvSpPr txBox="1"/>
-          <p:nvPr/>
-        </p:nvSpPr>
-        <p:spPr>
-          <a:xfrm>
-            <a:off x="640080" y="6217920"/>
-            <a:ext cx="9144000" cy="365760"/>
-          </a:xfrm>
-          <a:prstGeom prst="rect">
-            <a:avLst/>
-          </a:prstGeom>
-          <a:noFill/>
-          <a:ln/>
-        </p:spPr>
-        <p:txBody>
-          <a:bodyPr wrap="square" rtlCol="0" anchor="ctr"/>
-          <a:lstStyle/>
-          <a:p>
-            <a:pPr indent="0" marL="0">
-              <a:buNone/>
-            </a:pPr>
-            <a:r>
-              <a:rPr lang="en-US" sz="1200" dirty="0">
-                <a:solidFill>
-                  <a:srgbClr val="778DA9"/>
-                </a:solidFill>
-                <a:latin typeface="Calibri" pitchFamily="34" charset="0"/>
-                <a:ea typeface="Calibri" pitchFamily="34" charset="-122"/>
-                <a:cs typeface="Calibri" pitchFamily="34" charset="-120"/>
-              </a:rPr>
-              <a:t>[GRUPO — substituir]  ·  Armazenamento DAS e RAID para SBD — UFRJ</a:t>
-            </a:r>
-            <a:endParaRPr lang="en-US" sz="1200" dirty="0"/>
+      <p:grpSpPr/>
+      <p:sp>
+        <p:nvSpPr>
+          <p:cNvPr id="2" name="TextBox 1"/>
+          <p:cNvSpPr txBox="1"/>
+          <p:nvPr/>
+        </p:nvSpPr>
+        <p:spPr>
+          <a:xfrm>
+            <a:off x="685800" y="411480"/>
+            <a:ext cx="10789920" cy="548640"/>
+          </a:xfrm>
+          <a:prstGeom prst="rect">
+            <a:avLst/>
+          </a:prstGeom>
+          <a:noFill/>
+        </p:spPr>
+        <p:txBody>
+          <a:bodyPr wrap="square">
+            <a:spAutoFit/>
+          </a:bodyPr>
+          <a:lstStyle/>
+          <a:p>
+            <a:pPr>
+              <a:defRPr sz="2600" b="1">
+                <a:solidFill>
+                  <a:srgbClr val="18243A"/>
+                </a:solidFill>
+                <a:latin typeface="Aptos"/>
+              </a:defRPr>
+            </a:pPr>
+            <a:r>
+              <a:t>RAID fornece disponibilidade; backup fornece recuperação</a:t>
+            </a:r>
+          </a:p>
+        </p:txBody>
+      </p:sp>
+      <p:sp>
+        <p:nvSpPr>
+          <p:cNvPr id="3" name="TextBox 2"/>
+          <p:cNvSpPr txBox="1"/>
+          <p:nvPr/>
+        </p:nvSpPr>
+        <p:spPr>
+          <a:xfrm>
+            <a:off x="777240" y="1325880"/>
+            <a:ext cx="5120640" cy="365760"/>
+          </a:xfrm>
+          <a:prstGeom prst="rect">
+            <a:avLst/>
+          </a:prstGeom>
+          <a:noFill/>
+        </p:spPr>
+        <p:txBody>
+          <a:bodyPr wrap="square">
+            <a:spAutoFit/>
+          </a:bodyPr>
+          <a:lstStyle/>
+          <a:p>
+            <a:pPr>
+              <a:defRPr sz="1600" b="1">
+                <a:solidFill>
+                  <a:srgbClr val="C58D24"/>
+                </a:solidFill>
+                <a:latin typeface="Aptos"/>
+              </a:defRPr>
+            </a:pPr>
+            <a:r>
+              <a:t>RAID protege contra falhas previstas</a:t>
+            </a:r>
+          </a:p>
+        </p:txBody>
+      </p:sp>
+      <p:sp>
+        <p:nvSpPr>
+          <p:cNvPr id="4" name="TextBox 3"/>
+          <p:cNvSpPr txBox="1"/>
+          <p:nvPr/>
+        </p:nvSpPr>
+        <p:spPr>
+          <a:xfrm>
+            <a:off x="777240" y="1737360"/>
+            <a:ext cx="5120640" cy="4297680"/>
+          </a:xfrm>
+          <a:prstGeom prst="rect">
+            <a:avLst/>
+          </a:prstGeom>
+          <a:noFill/>
+        </p:spPr>
+        <p:txBody>
+          <a:bodyPr wrap="square">
+            <a:spAutoFit/>
+          </a:bodyPr>
+          <a:lstStyle/>
+          <a:p>
+            <a:pPr>
+              <a:defRPr sz="1500" b="0">
+                <a:solidFill>
+                  <a:srgbClr val="18243A"/>
+                </a:solidFill>
+                <a:latin typeface="Aptos"/>
+              </a:defRPr>
+            </a:pPr>
+            <a:r>
+              <a:t>• Tolera falha de disco conforme o nível</a:t>
+            </a:r>
+            <a:br/>
+            <a:r>
+              <a:t>• Pode manter o serviço durante rebuild</a:t>
+            </a:r>
+            <a:br/>
+            <a:r>
+              <a:t>• Hot spare reduz a janela de exposição</a:t>
+            </a:r>
+            <a:br/>
+            <a:r>
+              <a:t>• Não preserva estado histórico</a:t>
+            </a:r>
+            <a:br/>
+            <a:r>
+              <a:t>• Corrupção/exclusão pode atingir todo o array</a:t>
+            </a:r>
+          </a:p>
+        </p:txBody>
+      </p:sp>
+      <p:sp>
+        <p:nvSpPr>
+          <p:cNvPr id="5" name="TextBox 4"/>
+          <p:cNvSpPr txBox="1"/>
+          <p:nvPr/>
+        </p:nvSpPr>
+        <p:spPr>
+          <a:xfrm>
+            <a:off x="6263640" y="1325880"/>
+            <a:ext cx="5120640" cy="365760"/>
+          </a:xfrm>
+          <a:prstGeom prst="rect">
+            <a:avLst/>
+          </a:prstGeom>
+          <a:noFill/>
+        </p:spPr>
+        <p:txBody>
+          <a:bodyPr wrap="square">
+            <a:spAutoFit/>
+          </a:bodyPr>
+          <a:lstStyle/>
+          <a:p>
+            <a:pPr>
+              <a:defRPr sz="1600" b="1">
+                <a:solidFill>
+                  <a:srgbClr val="C58D24"/>
+                </a:solidFill>
+                <a:latin typeface="Aptos"/>
+              </a:defRPr>
+            </a:pPr>
+            <a:r>
+              <a:t>Backup é uma cópia independente</a:t>
+            </a:r>
+          </a:p>
+        </p:txBody>
+      </p:sp>
+      <p:sp>
+        <p:nvSpPr>
+          <p:cNvPr id="6" name="TextBox 5"/>
+          <p:cNvSpPr txBox="1"/>
+          <p:nvPr/>
+        </p:nvSpPr>
+        <p:spPr>
+          <a:xfrm>
+            <a:off x="6263640" y="1737360"/>
+            <a:ext cx="5120640" cy="4297680"/>
+          </a:xfrm>
+          <a:prstGeom prst="rect">
+            <a:avLst/>
+          </a:prstGeom>
+          <a:noFill/>
+        </p:spPr>
+        <p:txBody>
+          <a:bodyPr wrap="square">
+            <a:spAutoFit/>
+          </a:bodyPr>
+          <a:lstStyle/>
+          <a:p>
+            <a:pPr>
+              <a:defRPr sz="1500" b="0">
+                <a:solidFill>
+                  <a:srgbClr val="18243A"/>
+                </a:solidFill>
+                <a:latin typeface="Aptos"/>
+              </a:defRPr>
+            </a:pPr>
+            <a:r>
+              <a:t>• Versionado e preferencialmente off-site/imutável</a:t>
+            </a:r>
+            <a:br/>
+            <a:r>
+              <a:t>• Protege contra erro lógico e ransomware</a:t>
+            </a:r>
+            <a:br/>
+            <a:r>
+              <a:t>• Precisa de RPO e RTO</a:t>
+            </a:r>
+            <a:br/>
+            <a:r>
+              <a:t>• Restauração deve ser testada</a:t>
+            </a:r>
+            <a:br/>
+            <a:r>
+              <a:t>• RAID pode proteger o repositório, mas não substituí-lo</a:t>
+            </a:r>
+          </a:p>
+        </p:txBody>
+      </p:sp>
+      <p:sp>
+        <p:nvSpPr>
+          <p:cNvPr id="7" name="TextBox 6"/>
+          <p:cNvSpPr txBox="1"/>
+          <p:nvPr/>
+        </p:nvSpPr>
+        <p:spPr>
+          <a:xfrm>
+            <a:off x="777240" y="6217920"/>
+            <a:ext cx="10607040" cy="274320"/>
+          </a:xfrm>
+          <a:prstGeom prst="rect">
+            <a:avLst/>
+          </a:prstGeom>
+          <a:noFill/>
+        </p:spPr>
+        <p:txBody>
+          <a:bodyPr wrap="square">
+            <a:spAutoFit/>
+          </a:bodyPr>
+          <a:lstStyle/>
+          <a:p>
+            <a:pPr>
+              <a:defRPr sz="1000" b="0">
+                <a:solidFill>
+                  <a:srgbClr val="667085"/>
+                </a:solidFill>
+                <a:latin typeface="Aptos"/>
+              </a:defRPr>
+            </a:pPr>
+            <a:r>
+              <a:t>Fontes e hipóteses completas no relatório corrigido.</a:t>
+            </a:r>
           </a:p>
         </p:txBody>
       </p:sp>
@@ -14487,6 +14485,10 @@
           </a:solidFill>
           <a:ln/>
         </p:spPr>
+        <p:txBody>
+          <a:bodyPr/>
+          <a:p/>
+        </p:txBody>
       </p:sp>
       <p:sp>
         <p:nvSpPr>
@@ -14585,6 +14587,10 @@
           </a:solidFill>
           <a:ln/>
         </p:spPr>
+        <p:txBody>
+          <a:bodyPr/>
+          <a:p/>
+        </p:txBody>
       </p:sp>
       <p:sp>
         <p:nvSpPr>
@@ -14683,6 +14689,10 @@
           </a:solidFill>
           <a:ln/>
         </p:spPr>
+        <p:txBody>
+          <a:bodyPr/>
+          <a:p/>
+        </p:txBody>
       </p:sp>
       <p:sp>
         <p:nvSpPr>
@@ -14781,6 +14791,10 @@
           </a:solidFill>
           <a:ln/>
         </p:spPr>
+        <p:txBody>
+          <a:bodyPr/>
+          <a:p/>
+        </p:txBody>
       </p:sp>
       <p:sp>
         <p:nvSpPr>
@@ -14879,6 +14893,10 @@
           </a:solidFill>
           <a:ln/>
         </p:spPr>
+        <p:txBody>
+          <a:bodyPr/>
+          <a:p/>
+        </p:txBody>
       </p:sp>
       <p:sp>
         <p:nvSpPr>
@@ -14977,6 +14995,10 @@
           </a:solidFill>
           <a:ln/>
         </p:spPr>
+        <p:txBody>
+          <a:bodyPr/>
+          <a:p/>
+        </p:txBody>
       </p:sp>
       <p:sp>
         <p:nvSpPr>
@@ -15075,6 +15097,10 @@
           </a:solidFill>
           <a:ln/>
         </p:spPr>
+        <p:txBody>
+          <a:bodyPr/>
+          <a:p/>
+        </p:txBody>
       </p:sp>
       <p:sp>
         <p:nvSpPr>
@@ -15229,6 +15255,1367 @@
               <a:t>2</a:t>
             </a:r>
             <a:endParaRPr lang="en-US" sz="900" dirty="0"/>
+          </a:p>
+        </p:txBody>
+      </p:sp>
+    </p:spTree>
+  </p:cSld>
+  <p:clrMapOvr>
+    <a:masterClrMapping/>
+  </p:clrMapOvr>
+</p:sld>
+</file>
+
+<file path=ppt/slides/slide20.xml><?xml version="1.0" encoding="utf-8"?>
+<p:sld xmlns:a="http://schemas.openxmlformats.org/drawingml/2006/main" xmlns:r="http://schemas.openxmlformats.org/officeDocument/2006/relationships" xmlns:p="http://schemas.openxmlformats.org/presentationml/2006/main">
+  <p:cSld name="Slide 17">
+    <p:bg>
+      <p:bgPr>
+        <a:solidFill>
+          <a:srgbClr val="1B263B"/>
+        </a:solidFill>
+      </p:bgPr>
+    </p:bg>
+    <p:spTree>
+      <p:nvGrpSpPr>
+        <p:cNvPr id="1" name=""/>
+        <p:cNvGrpSpPr/>
+        <p:nvPr/>
+      </p:nvGrpSpPr>
+      <p:grpSpPr>
+        <a:xfrm>
+          <a:off x="0" y="0"/>
+          <a:ext cx="0" cy="0"/>
+          <a:chOff x="0" y="0"/>
+          <a:chExt cx="0" cy="0"/>
+        </a:xfrm>
+      </p:grpSpPr>
+      <p:sp>
+        <p:nvSpPr>
+          <p:cNvPr id="2" name="Shape 0"/>
+          <p:cNvSpPr/>
+          <p:nvPr/>
+        </p:nvSpPr>
+        <p:spPr>
+          <a:xfrm>
+            <a:off x="10241280" y="-1188720"/>
+            <a:ext cx="3108960" cy="3108960"/>
+          </a:xfrm>
+          <a:prstGeom prst="ellipse">
+            <a:avLst/>
+          </a:prstGeom>
+          <a:solidFill>
+            <a:srgbClr val="415A77">
+              <a:alpha val="40000"/>
+            </a:srgbClr>
+          </a:solidFill>
+          <a:ln/>
+        </p:spPr>
+        <p:txBody>
+          <a:bodyPr/>
+          <a:p/>
+        </p:txBody>
+      </p:sp>
+      <p:sp>
+        <p:nvSpPr>
+          <p:cNvPr id="3" name="Shape 1"/>
+          <p:cNvSpPr/>
+          <p:nvPr/>
+        </p:nvSpPr>
+        <p:spPr>
+          <a:xfrm>
+            <a:off x="11247120" y="182880"/>
+            <a:ext cx="1737360" cy="1737360"/>
+          </a:xfrm>
+          <a:prstGeom prst="ellipse">
+            <a:avLst/>
+          </a:prstGeom>
+          <a:solidFill>
+            <a:srgbClr val="E9C46A">
+              <a:alpha val="30000"/>
+            </a:srgbClr>
+          </a:solidFill>
+          <a:ln/>
+        </p:spPr>
+        <p:txBody>
+          <a:bodyPr/>
+          <a:p/>
+        </p:txBody>
+      </p:sp>
+      <p:sp>
+        <p:nvSpPr>
+          <p:cNvPr id="4" name="Text 2"/>
+          <p:cNvSpPr txBox="1"/>
+          <p:nvPr/>
+        </p:nvSpPr>
+        <p:spPr>
+          <a:xfrm>
+            <a:off x="640080" y="640080"/>
+            <a:ext cx="7315200" cy="640080"/>
+          </a:xfrm>
+          <a:prstGeom prst="rect">
+            <a:avLst/>
+          </a:prstGeom>
+          <a:noFill/>
+          <a:ln/>
+        </p:spPr>
+        <p:txBody>
+          <a:bodyPr wrap="square" rtlCol="0" anchor="ctr"/>
+          <a:lstStyle/>
+          <a:p>
+            <a:pPr indent="0" marL="0">
+              <a:buNone/>
+            </a:pPr>
+            <a:r>
+              <a:rPr lang="en-US" sz="3000" b="1" dirty="0">
+                <a:solidFill>
+                  <a:srgbClr val="FFFFFF"/>
+                </a:solidFill>
+                <a:latin typeface="Calibri" pitchFamily="34" charset="0"/>
+                <a:ea typeface="Calibri" pitchFamily="34" charset="-122"/>
+                <a:cs typeface="Calibri" pitchFamily="34" charset="-120"/>
+              </a:rPr>
+              <a:t>Conclusão</a:t>
+            </a:r>
+            <a:endParaRPr lang="en-US" sz="3000" dirty="0"/>
+          </a:p>
+        </p:txBody>
+      </p:sp>
+      <p:sp>
+        <p:nvSpPr>
+          <p:cNvPr id="5" name="Shape 3"/>
+          <p:cNvSpPr/>
+          <p:nvPr/>
+        </p:nvSpPr>
+        <p:spPr>
+          <a:xfrm>
+            <a:off x="731520" y="1737360"/>
+            <a:ext cx="384048" cy="384048"/>
+          </a:xfrm>
+          <a:prstGeom prst="ellipse">
+            <a:avLst/>
+          </a:prstGeom>
+          <a:solidFill>
+            <a:srgbClr val="E9C46A"/>
+          </a:solidFill>
+          <a:ln/>
+        </p:spPr>
+        <p:txBody>
+          <a:bodyPr/>
+          <a:p/>
+        </p:txBody>
+      </p:sp>
+      <p:sp>
+        <p:nvSpPr>
+          <p:cNvPr id="6" name="Text 4"/>
+          <p:cNvSpPr txBox="1"/>
+          <p:nvPr/>
+        </p:nvSpPr>
+        <p:spPr>
+          <a:xfrm>
+            <a:off x="731520" y="1737360"/>
+            <a:ext cx="384048" cy="384048"/>
+          </a:xfrm>
+          <a:prstGeom prst="rect">
+            <a:avLst/>
+          </a:prstGeom>
+          <a:noFill/>
+          <a:ln/>
+        </p:spPr>
+        <p:txBody>
+          <a:bodyPr wrap="square" rtlCol="0" anchor="ctr"/>
+          <a:lstStyle/>
+          <a:p>
+            <a:pPr algn="ctr" indent="0" marL="0">
+              <a:buNone/>
+            </a:pPr>
+            <a:r>
+              <a:rPr lang="en-US" sz="1400" b="1" dirty="0">
+                <a:solidFill>
+                  <a:srgbClr val="1B263B"/>
+                </a:solidFill>
+                <a:latin typeface="Calibri" pitchFamily="34" charset="0"/>
+                <a:ea typeface="Calibri" pitchFamily="34" charset="-122"/>
+                <a:cs typeface="Calibri" pitchFamily="34" charset="-120"/>
+              </a:rPr>
+              <a:t>1</a:t>
+            </a:r>
+            <a:endParaRPr lang="en-US" sz="1400" dirty="0"/>
+          </a:p>
+        </p:txBody>
+      </p:sp>
+      <p:sp>
+        <p:nvSpPr>
+          <p:cNvPr id="7" name="Text 5"/>
+          <p:cNvSpPr txBox="1"/>
+          <p:nvPr/>
+        </p:nvSpPr>
+        <p:spPr>
+          <a:xfrm>
+            <a:off x="1325880" y="1664208"/>
+            <a:ext cx="10058400" cy="960120"/>
+          </a:xfrm>
+          <a:prstGeom prst="rect">
+            <a:avLst/>
+          </a:prstGeom>
+          <a:noFill/>
+          <a:ln/>
+        </p:spPr>
+        <p:txBody>
+          <a:bodyPr wrap="square" rtlCol="0" anchor="ctr"/>
+          <a:lstStyle/>
+          <a:p>
+            <a:pPr indent="0" marL="0">
+              <a:lnSpc>
+                <a:spcPct val="115000"/>
+              </a:lnSpc>
+              <a:buNone/>
+            </a:pPr>
+            <a:r>
+              <a:rPr lang="en-US" sz="1500" dirty="0">
+                <a:solidFill>
+                  <a:srgbClr val="FFFFFF"/>
+                </a:solidFill>
+                <a:latin typeface="Calibri" pitchFamily="34" charset="0"/>
+                <a:ea typeface="Calibri" pitchFamily="34" charset="-122"/>
+                <a:cs typeface="Calibri" pitchFamily="34" charset="-120"/>
+              </a:rPr>
+              <a:t>A escolha de interface (SATA, eSATA, SAS, FireWire, USB, HBA) e de nível de RAID é uma decisão de arquitetura, não apenas de hardware.</a:t>
+            </a:r>
+            <a:endParaRPr lang="en-US" sz="1500" dirty="0"/>
+          </a:p>
+        </p:txBody>
+      </p:sp>
+      <p:sp>
+        <p:nvSpPr>
+          <p:cNvPr id="8" name="Shape 6"/>
+          <p:cNvSpPr/>
+          <p:nvPr/>
+        </p:nvSpPr>
+        <p:spPr>
+          <a:xfrm>
+            <a:off x="731520" y="2788920"/>
+            <a:ext cx="384048" cy="384048"/>
+          </a:xfrm>
+          <a:prstGeom prst="ellipse">
+            <a:avLst/>
+          </a:prstGeom>
+          <a:solidFill>
+            <a:srgbClr val="E9C46A"/>
+          </a:solidFill>
+          <a:ln/>
+        </p:spPr>
+        <p:txBody>
+          <a:bodyPr/>
+          <a:p/>
+        </p:txBody>
+      </p:sp>
+      <p:sp>
+        <p:nvSpPr>
+          <p:cNvPr id="9" name="Text 7"/>
+          <p:cNvSpPr txBox="1"/>
+          <p:nvPr/>
+        </p:nvSpPr>
+        <p:spPr>
+          <a:xfrm>
+            <a:off x="731520" y="2788920"/>
+            <a:ext cx="384048" cy="384048"/>
+          </a:xfrm>
+          <a:prstGeom prst="rect">
+            <a:avLst/>
+          </a:prstGeom>
+          <a:noFill/>
+          <a:ln/>
+        </p:spPr>
+        <p:txBody>
+          <a:bodyPr wrap="square" rtlCol="0" anchor="ctr"/>
+          <a:lstStyle/>
+          <a:p>
+            <a:pPr algn="ctr" indent="0" marL="0">
+              <a:buNone/>
+            </a:pPr>
+            <a:r>
+              <a:rPr lang="en-US" sz="1400" b="1" dirty="0">
+                <a:solidFill>
+                  <a:srgbClr val="1B263B"/>
+                </a:solidFill>
+                <a:latin typeface="Calibri" pitchFamily="34" charset="0"/>
+                <a:ea typeface="Calibri" pitchFamily="34" charset="-122"/>
+                <a:cs typeface="Calibri" pitchFamily="34" charset="-120"/>
+              </a:rPr>
+              <a:t>2</a:t>
+            </a:r>
+            <a:endParaRPr lang="en-US" sz="1400" dirty="0"/>
+          </a:p>
+        </p:txBody>
+      </p:sp>
+      <p:sp>
+        <p:nvSpPr>
+          <p:cNvPr id="10" name="Text 8"/>
+          <p:cNvSpPr txBox="1"/>
+          <p:nvPr/>
+        </p:nvSpPr>
+        <p:spPr>
+          <a:xfrm>
+            <a:off x="1325880" y="2715768"/>
+            <a:ext cx="10058400" cy="960120"/>
+          </a:xfrm>
+          <a:prstGeom prst="rect">
+            <a:avLst/>
+          </a:prstGeom>
+          <a:noFill/>
+          <a:ln/>
+        </p:spPr>
+        <p:txBody>
+          <a:bodyPr wrap="square" rtlCol="0" anchor="ctr"/>
+          <a:lstStyle/>
+          <a:p>
+            <a:pPr indent="0" marL="0">
+              <a:lnSpc>
+                <a:spcPct val="115000"/>
+              </a:lnSpc>
+              <a:buNone/>
+            </a:pPr>
+            <a:r>
+              <a:rPr lang="en-US" sz="1500" dirty="0">
+                <a:solidFill>
+                  <a:srgbClr val="FFFFFF"/>
+                </a:solidFill>
+                <a:latin typeface="Calibri" pitchFamily="34" charset="0"/>
+                <a:ea typeface="Calibri" pitchFamily="34" charset="-122"/>
+                <a:cs typeface="Calibri" pitchFamily="34" charset="-120"/>
+              </a:rPr>
+              <a:t>Paralelismo e redundância competem pelos mesmos discos: striping maximiza desempenho, mirroring/paridade sacrificam capacidade ou escrita por confiabilidade.</a:t>
+            </a:r>
+            <a:endParaRPr lang="en-US" sz="1500" dirty="0"/>
+          </a:p>
+        </p:txBody>
+      </p:sp>
+      <p:sp>
+        <p:nvSpPr>
+          <p:cNvPr id="11" name="Shape 9"/>
+          <p:cNvSpPr/>
+          <p:nvPr/>
+        </p:nvSpPr>
+        <p:spPr>
+          <a:xfrm>
+            <a:off x="731520" y="3840480"/>
+            <a:ext cx="384048" cy="384048"/>
+          </a:xfrm>
+          <a:prstGeom prst="ellipse">
+            <a:avLst/>
+          </a:prstGeom>
+          <a:solidFill>
+            <a:srgbClr val="E9C46A"/>
+          </a:solidFill>
+          <a:ln/>
+        </p:spPr>
+        <p:txBody>
+          <a:bodyPr/>
+          <a:p/>
+        </p:txBody>
+      </p:sp>
+      <p:sp>
+        <p:nvSpPr>
+          <p:cNvPr id="12" name="Text 10"/>
+          <p:cNvSpPr txBox="1"/>
+          <p:nvPr/>
+        </p:nvSpPr>
+        <p:spPr>
+          <a:xfrm>
+            <a:off x="731520" y="3840480"/>
+            <a:ext cx="384048" cy="384048"/>
+          </a:xfrm>
+          <a:prstGeom prst="rect">
+            <a:avLst/>
+          </a:prstGeom>
+          <a:noFill/>
+          <a:ln/>
+        </p:spPr>
+        <p:txBody>
+          <a:bodyPr wrap="square" rtlCol="0" anchor="ctr"/>
+          <a:lstStyle/>
+          <a:p>
+            <a:pPr algn="ctr" indent="0" marL="0">
+              <a:buNone/>
+            </a:pPr>
+            <a:r>
+              <a:rPr lang="en-US" sz="1400" b="1" dirty="0">
+                <a:solidFill>
+                  <a:srgbClr val="1B263B"/>
+                </a:solidFill>
+                <a:latin typeface="Calibri" pitchFamily="34" charset="0"/>
+                <a:ea typeface="Calibri" pitchFamily="34" charset="-122"/>
+                <a:cs typeface="Calibri" pitchFamily="34" charset="-120"/>
+              </a:rPr>
+              <a:t>3</a:t>
+            </a:r>
+            <a:endParaRPr lang="en-US" sz="1400" dirty="0"/>
+          </a:p>
+        </p:txBody>
+      </p:sp>
+      <p:sp>
+        <p:nvSpPr>
+          <p:cNvPr id="13" name="Text 11"/>
+          <p:cNvSpPr txBox="1"/>
+          <p:nvPr/>
+        </p:nvSpPr>
+        <p:spPr>
+          <a:xfrm>
+            <a:off x="1325880" y="3767328"/>
+            <a:ext cx="10058400" cy="960120"/>
+          </a:xfrm>
+          <a:prstGeom prst="rect">
+            <a:avLst/>
+          </a:prstGeom>
+          <a:noFill/>
+          <a:ln/>
+        </p:spPr>
+        <p:txBody>
+          <a:bodyPr wrap="square" rtlCol="0" anchor="ctr"/>
+          <a:lstStyle/>
+          <a:p>
+            <a:pPr indent="0" marL="0">
+              <a:lnSpc>
+                <a:spcPct val="115000"/>
+              </a:lnSpc>
+              <a:buNone/>
+            </a:pPr>
+            <a:r>
+              <a:rPr lang="en-US" sz="1500" dirty="0">
+                <a:solidFill>
+                  <a:srgbClr val="FFFFFF"/>
+                </a:solidFill>
+                <a:latin typeface="Calibri" pitchFamily="34" charset="0"/>
+                <a:ea typeface="Calibri" pitchFamily="34" charset="-122"/>
+                <a:cs typeface="Calibri" pitchFamily="34" charset="-120"/>
+              </a:rPr>
+              <a:t>MTTF, MTBF, MTTR e MTTDL permitem quantificar esse equilíbrio — e explicam a preferência crescente por RAID6 e RAID10 em discos de alta capacidade.</a:t>
+            </a:r>
+            <a:endParaRPr lang="en-US" sz="1500" dirty="0"/>
+          </a:p>
+        </p:txBody>
+      </p:sp>
+      <p:sp>
+        <p:nvSpPr>
+          <p:cNvPr id="14" name="Shape 12"/>
+          <p:cNvSpPr/>
+          <p:nvPr/>
+        </p:nvSpPr>
+        <p:spPr>
+          <a:xfrm>
+            <a:off x="731520" y="4892040"/>
+            <a:ext cx="384048" cy="384048"/>
+          </a:xfrm>
+          <a:prstGeom prst="ellipse">
+            <a:avLst/>
+          </a:prstGeom>
+          <a:solidFill>
+            <a:srgbClr val="E9C46A"/>
+          </a:solidFill>
+          <a:ln/>
+        </p:spPr>
+        <p:txBody>
+          <a:bodyPr/>
+          <a:p/>
+        </p:txBody>
+      </p:sp>
+      <p:sp>
+        <p:nvSpPr>
+          <p:cNvPr id="15" name="Text 13"/>
+          <p:cNvSpPr txBox="1"/>
+          <p:nvPr/>
+        </p:nvSpPr>
+        <p:spPr>
+          <a:xfrm>
+            <a:off x="731520" y="4892040"/>
+            <a:ext cx="384048" cy="384048"/>
+          </a:xfrm>
+          <a:prstGeom prst="rect">
+            <a:avLst/>
+          </a:prstGeom>
+          <a:noFill/>
+          <a:ln/>
+        </p:spPr>
+        <p:txBody>
+          <a:bodyPr wrap="square" rtlCol="0" anchor="ctr"/>
+          <a:lstStyle/>
+          <a:p>
+            <a:pPr algn="ctr" indent="0" marL="0">
+              <a:buNone/>
+            </a:pPr>
+            <a:r>
+              <a:rPr lang="en-US" sz="1400" b="1" dirty="0">
+                <a:solidFill>
+                  <a:srgbClr val="1B263B"/>
+                </a:solidFill>
+                <a:latin typeface="Calibri" pitchFamily="34" charset="0"/>
+                <a:ea typeface="Calibri" pitchFamily="34" charset="-122"/>
+                <a:cs typeface="Calibri" pitchFamily="34" charset="-120"/>
+              </a:rPr>
+              <a:t>4</a:t>
+            </a:r>
+            <a:endParaRPr lang="en-US" sz="1400" dirty="0"/>
+          </a:p>
+        </p:txBody>
+      </p:sp>
+      <p:sp>
+        <p:nvSpPr>
+          <p:cNvPr id="16" name="Text 14"/>
+          <p:cNvSpPr txBox="1"/>
+          <p:nvPr/>
+        </p:nvSpPr>
+        <p:spPr>
+          <a:xfrm>
+            <a:off x="1325880" y="4818888"/>
+            <a:ext cx="10058400" cy="960120"/>
+          </a:xfrm>
+          <a:prstGeom prst="rect">
+            <a:avLst/>
+          </a:prstGeom>
+          <a:noFill/>
+          <a:ln/>
+        </p:spPr>
+        <p:txBody>
+          <a:bodyPr wrap="square" rtlCol="0" anchor="ctr"/>
+          <a:lstStyle/>
+          <a:p>
+            <a:pPr indent="0" marL="0">
+              <a:lnSpc>
+                <a:spcPct val="115000"/>
+              </a:lnSpc>
+              <a:buNone/>
+            </a:pPr>
+            <a:r>
+              <a:rPr lang="en-US" sz="1500" dirty="0">
+                <a:solidFill>
+                  <a:srgbClr val="FFFFFF"/>
+                </a:solidFill>
+                <a:latin typeface="Calibri" pitchFamily="34" charset="0"/>
+                <a:ea typeface="Calibri" pitchFamily="34" charset="-122"/>
+                <a:cs typeface="Calibri" pitchFamily="34" charset="-120"/>
+              </a:rPr>
+              <a:t>Níveis não padrão (1.5, 7, DP, S, Matrix) mostram como fabricantes adaptam os conceitos acadêmicos às suas próprias arquiteturas.</a:t>
+            </a:r>
+            <a:endParaRPr lang="en-US" sz="1500" dirty="0"/>
+          </a:p>
+        </p:txBody>
+      </p:sp>
+    </p:spTree>
+  </p:cSld>
+  <p:clrMapOvr>
+    <a:masterClrMapping/>
+  </p:clrMapOvr>
+</p:sld>
+</file>
+
+<file path=ppt/slides/slide21.xml><?xml version="1.0" encoding="utf-8"?>
+<p:sld xmlns:a="http://schemas.openxmlformats.org/drawingml/2006/main" xmlns:r="http://schemas.openxmlformats.org/officeDocument/2006/relationships" xmlns:p="http://schemas.openxmlformats.org/presentationml/2006/main">
+  <p:cSld name="Slide 18">
+    <p:bg>
+      <p:bgPr>
+        <a:solidFill>
+          <a:srgbClr val="FFFFFF"/>
+        </a:solidFill>
+      </p:bgPr>
+    </p:bg>
+    <p:spTree>
+      <p:nvGrpSpPr>
+        <p:cNvPr id="1" name=""/>
+        <p:cNvGrpSpPr/>
+        <p:nvPr/>
+      </p:nvGrpSpPr>
+      <p:grpSpPr>
+        <a:xfrm>
+          <a:off x="0" y="0"/>
+          <a:ext cx="0" cy="0"/>
+          <a:chOff x="0" y="0"/>
+          <a:chExt cx="0" cy="0"/>
+        </a:xfrm>
+      </p:grpSpPr>
+      <p:sp>
+        <p:nvSpPr>
+          <p:cNvPr id="2" name="Text 0"/>
+          <p:cNvSpPr txBox="1"/>
+          <p:nvPr/>
+        </p:nvSpPr>
+        <p:spPr>
+          <a:xfrm>
+            <a:off x="457200" y="320040"/>
+            <a:ext cx="11247120" cy="548640"/>
+          </a:xfrm>
+          <a:prstGeom prst="rect">
+            <a:avLst/>
+          </a:prstGeom>
+          <a:noFill/>
+          <a:ln/>
+        </p:spPr>
+        <p:txBody>
+          <a:bodyPr wrap="square" rtlCol="0" anchor="ctr"/>
+          <a:lstStyle/>
+          <a:p>
+            <a:pPr indent="0" marL="0">
+              <a:buNone/>
+            </a:pPr>
+            <a:r>
+              <a:rPr lang="en-US" sz="2600" b="1" dirty="0">
+                <a:solidFill>
+                  <a:srgbClr val="1B263B"/>
+                </a:solidFill>
+                <a:latin typeface="Calibri" pitchFamily="34" charset="0"/>
+                <a:ea typeface="Calibri" pitchFamily="34" charset="-122"/>
+                <a:cs typeface="Calibri" pitchFamily="34" charset="-120"/>
+              </a:rPr>
+              <a:t>Post-Mortem — Uso de IA Generativa</a:t>
+            </a:r>
+            <a:endParaRPr lang="en-US" sz="2600" dirty="0"/>
+          </a:p>
+        </p:txBody>
+      </p:sp>
+      <p:sp>
+        <p:nvSpPr>
+          <p:cNvPr id="3" name="Text 1"/>
+          <p:cNvSpPr txBox="1"/>
+          <p:nvPr/>
+        </p:nvSpPr>
+        <p:spPr>
+          <a:xfrm>
+            <a:off x="548640" y="1051560"/>
+            <a:ext cx="10972800" cy="365760"/>
+          </a:xfrm>
+          <a:prstGeom prst="rect">
+            <a:avLst/>
+          </a:prstGeom>
+          <a:noFill/>
+          <a:ln/>
+        </p:spPr>
+        <p:txBody>
+          <a:bodyPr wrap="square" rtlCol="0" anchor="ctr"/>
+          <a:lstStyle/>
+          <a:p>
+            <a:pPr indent="0" marL="0">
+              <a:buNone/>
+            </a:pPr>
+            <a:r>
+              <a:rPr lang="en-US" sz="1300" i="1" dirty="0">
+                <a:solidFill>
+                  <a:srgbClr val="5B6B79"/>
+                </a:solidFill>
+                <a:latin typeface="Calibri" pitchFamily="34" charset="0"/>
+                <a:ea typeface="Calibri" pitchFamily="34" charset="-122"/>
+                <a:cs typeface="Calibri" pitchFamily="34" charset="-120"/>
+              </a:rPr>
+              <a:t>Assistente utilizado: Claude (Anthropic)</a:t>
+            </a:r>
+            <a:endParaRPr lang="en-US" sz="1300" dirty="0"/>
+          </a:p>
+        </p:txBody>
+      </p:sp>
+      <p:sp>
+        <p:nvSpPr>
+          <p:cNvPr id="4" name="Shape 2"/>
+          <p:cNvSpPr/>
+          <p:nvPr/>
+        </p:nvSpPr>
+        <p:spPr>
+          <a:xfrm>
+            <a:off x="548640" y="1600200"/>
+            <a:ext cx="3520440" cy="4297680"/>
+          </a:xfrm>
+          <a:prstGeom prst="roundRect">
+            <a:avLst>
+              <a:gd name="adj" fmla="val 2078"/>
+            </a:avLst>
+          </a:prstGeom>
+          <a:solidFill>
+            <a:srgbClr val="FFFFFF"/>
+          </a:solidFill>
+          <a:ln w="12700">
+            <a:solidFill>
+              <a:srgbClr val="D8DEE4"/>
+            </a:solidFill>
+            <a:prstDash val="solid"/>
+          </a:ln>
+          <a:effectLst>
+            <a:outerShdw sx="100000" sy="100000" kx="0" ky="0" algn="bl" rotWithShape="0" blurRad="76200" dist="25400" dir="5400000">
+              <a:srgbClr val="1B263B">
+                <a:alpha val="12000"/>
+              </a:srgbClr>
+            </a:outerShdw>
+          </a:effectLst>
+        </p:spPr>
+        <p:txBody>
+          <a:bodyPr/>
+          <a:p/>
+        </p:txBody>
+      </p:sp>
+      <p:sp>
+        <p:nvSpPr>
+          <p:cNvPr id="5" name="Shape 3"/>
+          <p:cNvSpPr/>
+          <p:nvPr/>
+        </p:nvSpPr>
+        <p:spPr>
+          <a:xfrm>
+            <a:off x="548640" y="1600200"/>
+            <a:ext cx="3520440" cy="502920"/>
+          </a:xfrm>
+          <a:prstGeom prst="rect">
+            <a:avLst/>
+          </a:prstGeom>
+          <a:solidFill>
+            <a:srgbClr val="415A77"/>
+          </a:solidFill>
+          <a:ln/>
+        </p:spPr>
+        <p:txBody>
+          <a:bodyPr/>
+          <a:p/>
+        </p:txBody>
+      </p:sp>
+      <p:sp>
+        <p:nvSpPr>
+          <p:cNvPr id="6" name="Text 4"/>
+          <p:cNvSpPr txBox="1"/>
+          <p:nvPr/>
+        </p:nvSpPr>
+        <p:spPr>
+          <a:xfrm>
+            <a:off x="548640" y="1600200"/>
+            <a:ext cx="3520440" cy="502920"/>
+          </a:xfrm>
+          <a:prstGeom prst="rect">
+            <a:avLst/>
+          </a:prstGeom>
+          <a:noFill/>
+          <a:ln/>
+        </p:spPr>
+        <p:txBody>
+          <a:bodyPr wrap="square" rtlCol="0" anchor="ctr"/>
+          <a:lstStyle/>
+          <a:p>
+            <a:pPr algn="ctr" indent="0" marL="0">
+              <a:buNone/>
+            </a:pPr>
+            <a:r>
+              <a:rPr lang="en-US" sz="1500" b="1" dirty="0">
+                <a:solidFill>
+                  <a:srgbClr val="FFFFFF"/>
+                </a:solidFill>
+                <a:latin typeface="Calibri" pitchFamily="34" charset="0"/>
+                <a:ea typeface="Calibri" pitchFamily="34" charset="-122"/>
+                <a:cs typeface="Calibri" pitchFamily="34" charset="-120"/>
+              </a:rPr>
+              <a:t>Log de prompts</a:t>
+            </a:r>
+            <a:endParaRPr lang="en-US" sz="1500" dirty="0"/>
+          </a:p>
+        </p:txBody>
+      </p:sp>
+      <p:sp>
+        <p:nvSpPr>
+          <p:cNvPr id="7" name="Text 5"/>
+          <p:cNvSpPr txBox="1"/>
+          <p:nvPr/>
+        </p:nvSpPr>
+        <p:spPr>
+          <a:xfrm>
+            <a:off x="777240" y="2377440"/>
+            <a:ext cx="3063240" cy="3291840"/>
+          </a:xfrm>
+          <a:prstGeom prst="rect">
+            <a:avLst/>
+          </a:prstGeom>
+          <a:noFill/>
+          <a:ln/>
+        </p:spPr>
+        <p:txBody>
+          <a:bodyPr wrap="square" rtlCol="0" anchor="t"/>
+          <a:lstStyle/>
+          <a:p>
+            <a:pPr indent="0" marL="0">
+              <a:lnSpc>
+                <a:spcPct val="125000"/>
+              </a:lnSpc>
+              <a:buNone/>
+            </a:pPr>
+            <a:r>
+              <a:rPr lang="en-US" sz="1250" dirty="0">
+                <a:solidFill>
+                  <a:srgbClr val="1B263B"/>
+                </a:solidFill>
+                <a:latin typeface="Calibri" pitchFamily="34" charset="0"/>
+                <a:ea typeface="Calibri" pitchFamily="34" charset="-122"/>
+                <a:cs typeface="Calibri" pitchFamily="34" charset="-120"/>
+              </a:rPr>
+              <a:t>Registro cronológico dos prompts-chave: envio do enunciado, dos arquivos de referência da disciplina, pesquisa de especificações atuais (SAS-4, USB4 v2.0) e geração do relatório/slides.</a:t>
+            </a:r>
+            <a:endParaRPr lang="en-US" sz="1250" dirty="0"/>
+          </a:p>
+        </p:txBody>
+      </p:sp>
+      <p:sp>
+        <p:nvSpPr>
+          <p:cNvPr id="8" name="Shape 6"/>
+          <p:cNvSpPr/>
+          <p:nvPr/>
+        </p:nvSpPr>
+        <p:spPr>
+          <a:xfrm>
+            <a:off x="4389120" y="1600200"/>
+            <a:ext cx="3520440" cy="4297680"/>
+          </a:xfrm>
+          <a:prstGeom prst="roundRect">
+            <a:avLst>
+              <a:gd name="adj" fmla="val 2078"/>
+            </a:avLst>
+          </a:prstGeom>
+          <a:solidFill>
+            <a:srgbClr val="FFFFFF"/>
+          </a:solidFill>
+          <a:ln w="12700">
+            <a:solidFill>
+              <a:srgbClr val="D8DEE4"/>
+            </a:solidFill>
+            <a:prstDash val="solid"/>
+          </a:ln>
+          <a:effectLst>
+            <a:outerShdw sx="100000" sy="100000" kx="0" ky="0" algn="bl" rotWithShape="0" blurRad="76200" dist="25400" dir="5400000">
+              <a:srgbClr val="1B263B">
+                <a:alpha val="12000"/>
+              </a:srgbClr>
+            </a:outerShdw>
+          </a:effectLst>
+        </p:spPr>
+        <p:txBody>
+          <a:bodyPr/>
+          <a:p/>
+        </p:txBody>
+      </p:sp>
+      <p:sp>
+        <p:nvSpPr>
+          <p:cNvPr id="9" name="Shape 7"/>
+          <p:cNvSpPr/>
+          <p:nvPr/>
+        </p:nvSpPr>
+        <p:spPr>
+          <a:xfrm>
+            <a:off x="4389120" y="1600200"/>
+            <a:ext cx="3520440" cy="502920"/>
+          </a:xfrm>
+          <a:prstGeom prst="rect">
+            <a:avLst/>
+          </a:prstGeom>
+          <a:solidFill>
+            <a:srgbClr val="415A77"/>
+          </a:solidFill>
+          <a:ln/>
+        </p:spPr>
+        <p:txBody>
+          <a:bodyPr/>
+          <a:p/>
+        </p:txBody>
+      </p:sp>
+      <p:sp>
+        <p:nvSpPr>
+          <p:cNvPr id="10" name="Text 8"/>
+          <p:cNvSpPr txBox="1"/>
+          <p:nvPr/>
+        </p:nvSpPr>
+        <p:spPr>
+          <a:xfrm>
+            <a:off x="4389120" y="1600200"/>
+            <a:ext cx="3520440" cy="502920"/>
+          </a:xfrm>
+          <a:prstGeom prst="rect">
+            <a:avLst/>
+          </a:prstGeom>
+          <a:noFill/>
+          <a:ln/>
+        </p:spPr>
+        <p:txBody>
+          <a:bodyPr wrap="square" rtlCol="0" anchor="ctr"/>
+          <a:lstStyle/>
+          <a:p>
+            <a:pPr algn="ctr" indent="0" marL="0">
+              <a:buNone/>
+            </a:pPr>
+            <a:r>
+              <a:rPr lang="en-US" sz="1500" b="1" dirty="0">
+                <a:solidFill>
+                  <a:srgbClr val="FFFFFF"/>
+                </a:solidFill>
+                <a:latin typeface="Calibri" pitchFamily="34" charset="0"/>
+                <a:ea typeface="Calibri" pitchFamily="34" charset="-122"/>
+                <a:cs typeface="Calibri" pitchFamily="34" charset="-120"/>
+              </a:rPr>
+              <a:t>Autoria</a:t>
+            </a:r>
+            <a:endParaRPr lang="en-US" sz="1500" dirty="0"/>
+          </a:p>
+        </p:txBody>
+      </p:sp>
+      <p:sp>
+        <p:nvSpPr>
+          <p:cNvPr id="11" name="Text 9"/>
+          <p:cNvSpPr txBox="1"/>
+          <p:nvPr/>
+        </p:nvSpPr>
+        <p:spPr>
+          <a:xfrm>
+            <a:off x="4617720" y="2377440"/>
+            <a:ext cx="3063240" cy="3291840"/>
+          </a:xfrm>
+          <a:prstGeom prst="rect">
+            <a:avLst/>
+          </a:prstGeom>
+          <a:noFill/>
+          <a:ln/>
+        </p:spPr>
+        <p:txBody>
+          <a:bodyPr wrap="square" rtlCol="0" anchor="t"/>
+          <a:lstStyle/>
+          <a:p>
+            <a:pPr indent="0" marL="0">
+              <a:lnSpc>
+                <a:spcPct val="125000"/>
+              </a:lnSpc>
+              <a:buNone/>
+            </a:pPr>
+            <a:r>
+              <a:rPr lang="en-US" sz="1250" dirty="0">
+                <a:solidFill>
+                  <a:srgbClr val="1B263B"/>
+                </a:solidFill>
+                <a:latin typeface="Calibri" pitchFamily="34" charset="0"/>
+                <a:ea typeface="Calibri" pitchFamily="34" charset="-122"/>
+                <a:cs typeface="Calibri" pitchFamily="34" charset="-120"/>
+              </a:rPr>
+              <a:t>Cada integrante documenta o que fez, quais decisões tomou e por quê — detalhado nas Seções 12.3 e 12.4 do relatório em PDF.</a:t>
+            </a:r>
+            <a:endParaRPr lang="en-US" sz="1250" dirty="0"/>
+          </a:p>
+        </p:txBody>
+      </p:sp>
+      <p:sp>
+        <p:nvSpPr>
+          <p:cNvPr id="12" name="Shape 10"/>
+          <p:cNvSpPr/>
+          <p:nvPr/>
+        </p:nvSpPr>
+        <p:spPr>
+          <a:xfrm>
+            <a:off x="8229600" y="1600200"/>
+            <a:ext cx="3520440" cy="4297680"/>
+          </a:xfrm>
+          <a:prstGeom prst="roundRect">
+            <a:avLst>
+              <a:gd name="adj" fmla="val 2078"/>
+            </a:avLst>
+          </a:prstGeom>
+          <a:solidFill>
+            <a:srgbClr val="FFFFFF"/>
+          </a:solidFill>
+          <a:ln w="12700">
+            <a:solidFill>
+              <a:srgbClr val="D8DEE4"/>
+            </a:solidFill>
+            <a:prstDash val="solid"/>
+          </a:ln>
+          <a:effectLst>
+            <a:outerShdw sx="100000" sy="100000" kx="0" ky="0" algn="bl" rotWithShape="0" blurRad="76200" dist="25400" dir="5400000">
+              <a:srgbClr val="1B263B">
+                <a:alpha val="12000"/>
+              </a:srgbClr>
+            </a:outerShdw>
+          </a:effectLst>
+        </p:spPr>
+        <p:txBody>
+          <a:bodyPr/>
+          <a:p/>
+        </p:txBody>
+      </p:sp>
+      <p:sp>
+        <p:nvSpPr>
+          <p:cNvPr id="13" name="Shape 11"/>
+          <p:cNvSpPr/>
+          <p:nvPr/>
+        </p:nvSpPr>
+        <p:spPr>
+          <a:xfrm>
+            <a:off x="8229600" y="1600200"/>
+            <a:ext cx="3520440" cy="502920"/>
+          </a:xfrm>
+          <a:prstGeom prst="rect">
+            <a:avLst/>
+          </a:prstGeom>
+          <a:solidFill>
+            <a:srgbClr val="415A77"/>
+          </a:solidFill>
+          <a:ln/>
+        </p:spPr>
+        <p:txBody>
+          <a:bodyPr/>
+          <a:p/>
+        </p:txBody>
+      </p:sp>
+      <p:sp>
+        <p:nvSpPr>
+          <p:cNvPr id="14" name="Text 12"/>
+          <p:cNvSpPr txBox="1"/>
+          <p:nvPr/>
+        </p:nvSpPr>
+        <p:spPr>
+          <a:xfrm>
+            <a:off x="8229600" y="1600200"/>
+            <a:ext cx="3520440" cy="502920"/>
+          </a:xfrm>
+          <a:prstGeom prst="rect">
+            <a:avLst/>
+          </a:prstGeom>
+          <a:noFill/>
+          <a:ln/>
+        </p:spPr>
+        <p:txBody>
+          <a:bodyPr wrap="square" rtlCol="0" anchor="ctr"/>
+          <a:lstStyle/>
+          <a:p>
+            <a:pPr algn="ctr" indent="0" marL="0">
+              <a:buNone/>
+            </a:pPr>
+            <a:r>
+              <a:rPr lang="en-US" sz="1500" b="1" dirty="0">
+                <a:solidFill>
+                  <a:srgbClr val="FFFFFF"/>
+                </a:solidFill>
+                <a:latin typeface="Calibri" pitchFamily="34" charset="0"/>
+                <a:ea typeface="Calibri" pitchFamily="34" charset="-122"/>
+                <a:cs typeface="Calibri" pitchFamily="34" charset="-120"/>
+              </a:rPr>
+              <a:t>Erros corrigidos</a:t>
+            </a:r>
+            <a:endParaRPr lang="en-US" sz="1500" dirty="0"/>
+          </a:p>
+        </p:txBody>
+      </p:sp>
+      <p:sp>
+        <p:nvSpPr>
+          <p:cNvPr id="15" name="Text 13"/>
+          <p:cNvSpPr txBox="1"/>
+          <p:nvPr/>
+        </p:nvSpPr>
+        <p:spPr>
+          <a:xfrm>
+            <a:off x="8458200" y="2377440"/>
+            <a:ext cx="3063240" cy="3291840"/>
+          </a:xfrm>
+          <a:prstGeom prst="rect">
+            <a:avLst/>
+          </a:prstGeom>
+          <a:noFill/>
+          <a:ln/>
+        </p:spPr>
+        <p:txBody>
+          <a:bodyPr wrap="square" rtlCol="0" anchor="t"/>
+          <a:lstStyle/>
+          <a:p>
+            <a:pPr indent="0" marL="0">
+              <a:lnSpc>
+                <a:spcPct val="125000"/>
+              </a:lnSpc>
+              <a:buNone/>
+            </a:pPr>
+            <a:r>
+              <a:rPr lang="en-US" sz="1250" dirty="0">
+                <a:solidFill>
+                  <a:srgbClr val="1B263B"/>
+                </a:solidFill>
+                <a:latin typeface="Calibri" pitchFamily="34" charset="0"/>
+                <a:ea typeface="Calibri" pitchFamily="34" charset="-122"/>
+                <a:cs typeface="Calibri" pitchFamily="34" charset="-120"/>
+              </a:rPr>
+              <a:t>Velocidades de interface verificadas via pesquisa web (não só memória do modelo); distinção formal MTTF x MTBF explicitada; níveis não padrão marcados como proprietários.</a:t>
+            </a:r>
+            <a:endParaRPr lang="en-US" sz="1250" dirty="0"/>
+          </a:p>
+        </p:txBody>
+      </p:sp>
+      <p:sp>
+        <p:nvSpPr>
+          <p:cNvPr id="16" name="Text 14"/>
+          <p:cNvSpPr txBox="1"/>
+          <p:nvPr/>
+        </p:nvSpPr>
+        <p:spPr>
+          <a:xfrm>
+            <a:off x="457200" y="6528816"/>
+            <a:ext cx="8229600" cy="274320"/>
+          </a:xfrm>
+          <a:prstGeom prst="rect">
+            <a:avLst/>
+          </a:prstGeom>
+          <a:noFill/>
+          <a:ln/>
+        </p:spPr>
+        <p:txBody>
+          <a:bodyPr wrap="square" rtlCol="0" anchor="ctr"/>
+          <a:lstStyle/>
+          <a:p>
+            <a:pPr indent="0" marL="0">
+              <a:buNone/>
+            </a:pPr>
+            <a:r>
+              <a:rPr lang="en-US" sz="900" dirty="0">
+                <a:solidFill>
+                  <a:srgbClr val="5B6B79"/>
+                </a:solidFill>
+                <a:latin typeface="Calibri" pitchFamily="34" charset="0"/>
+                <a:ea typeface="Calibri" pitchFamily="34" charset="-122"/>
+                <a:cs typeface="Calibri" pitchFamily="34" charset="-120"/>
+              </a:rPr>
+              <a:t>Armazenamento DAS e RAID para SBD — UFRJ</a:t>
+            </a:r>
+            <a:endParaRPr lang="en-US" sz="900" dirty="0"/>
+          </a:p>
+        </p:txBody>
+      </p:sp>
+      <p:sp>
+        <p:nvSpPr>
+          <p:cNvPr id="17" name="Text 15"/>
+          <p:cNvSpPr txBox="1"/>
+          <p:nvPr/>
+        </p:nvSpPr>
+        <p:spPr>
+          <a:xfrm>
+            <a:off x="11338560" y="6528816"/>
+            <a:ext cx="365760" cy="274320"/>
+          </a:xfrm>
+          <a:prstGeom prst="rect">
+            <a:avLst/>
+          </a:prstGeom>
+          <a:noFill/>
+          <a:ln/>
+        </p:spPr>
+        <p:txBody>
+          <a:bodyPr wrap="square" rtlCol="0" anchor="ctr"/>
+          <a:lstStyle/>
+          <a:p>
+            <a:pPr algn="r" indent="0" marL="0">
+              <a:buNone/>
+            </a:pPr>
+            <a:r>
+              <a:rPr lang="en-US" sz="900" dirty="0">
+                <a:solidFill>
+                  <a:srgbClr val="5B6B79"/>
+                </a:solidFill>
+                <a:latin typeface="Calibri" pitchFamily="34" charset="0"/>
+                <a:ea typeface="Calibri" pitchFamily="34" charset="-122"/>
+                <a:cs typeface="Calibri" pitchFamily="34" charset="-120"/>
+              </a:rPr>
+              <a:t>18</a:t>
+            </a:r>
+            <a:endParaRPr lang="en-US" sz="900" dirty="0"/>
+          </a:p>
+        </p:txBody>
+      </p:sp>
+    </p:spTree>
+  </p:cSld>
+  <p:clrMapOvr>
+    <a:masterClrMapping/>
+  </p:clrMapOvr>
+</p:sld>
+</file>
+
+<file path=ppt/slides/slide22.xml><?xml version="1.0" encoding="utf-8"?>
+<p:sld xmlns:a="http://schemas.openxmlformats.org/drawingml/2006/main" xmlns:r="http://schemas.openxmlformats.org/officeDocument/2006/relationships" xmlns:p="http://schemas.openxmlformats.org/presentationml/2006/main">
+  <p:cSld name="Slide 19">
+    <p:bg>
+      <p:bgPr>
+        <a:solidFill>
+          <a:srgbClr val="1B263B"/>
+        </a:solidFill>
+      </p:bgPr>
+    </p:bg>
+    <p:spTree>
+      <p:nvGrpSpPr>
+        <p:cNvPr id="1" name=""/>
+        <p:cNvGrpSpPr/>
+        <p:nvPr/>
+      </p:nvGrpSpPr>
+      <p:grpSpPr>
+        <a:xfrm>
+          <a:off x="0" y="0"/>
+          <a:ext cx="0" cy="0"/>
+          <a:chOff x="0" y="0"/>
+          <a:chExt cx="0" cy="0"/>
+        </a:xfrm>
+      </p:grpSpPr>
+      <p:sp>
+        <p:nvSpPr>
+          <p:cNvPr id="2" name="Shape 0"/>
+          <p:cNvSpPr/>
+          <p:nvPr/>
+        </p:nvSpPr>
+        <p:spPr>
+          <a:xfrm>
+            <a:off x="10241280" y="-1188720"/>
+            <a:ext cx="3108960" cy="3108960"/>
+          </a:xfrm>
+          <a:prstGeom prst="ellipse">
+            <a:avLst/>
+          </a:prstGeom>
+          <a:solidFill>
+            <a:srgbClr val="415A77">
+              <a:alpha val="40000"/>
+            </a:srgbClr>
+          </a:solidFill>
+          <a:ln/>
+        </p:spPr>
+        <p:txBody>
+          <a:bodyPr/>
+          <a:p/>
+        </p:txBody>
+      </p:sp>
+      <p:sp>
+        <p:nvSpPr>
+          <p:cNvPr id="3" name="Shape 1"/>
+          <p:cNvSpPr/>
+          <p:nvPr/>
+        </p:nvSpPr>
+        <p:spPr>
+          <a:xfrm>
+            <a:off x="11247120" y="182880"/>
+            <a:ext cx="1737360" cy="1737360"/>
+          </a:xfrm>
+          <a:prstGeom prst="ellipse">
+            <a:avLst/>
+          </a:prstGeom>
+          <a:solidFill>
+            <a:srgbClr val="E9C46A">
+              <a:alpha val="30000"/>
+            </a:srgbClr>
+          </a:solidFill>
+          <a:ln/>
+        </p:spPr>
+        <p:txBody>
+          <a:bodyPr/>
+          <a:p/>
+        </p:txBody>
+      </p:sp>
+      <p:sp>
+        <p:nvSpPr>
+          <p:cNvPr id="4" name="Text 2"/>
+          <p:cNvSpPr txBox="1"/>
+          <p:nvPr/>
+        </p:nvSpPr>
+        <p:spPr>
+          <a:xfrm>
+            <a:off x="640080" y="2743200"/>
+            <a:ext cx="7315200" cy="731520"/>
+          </a:xfrm>
+          <a:prstGeom prst="rect">
+            <a:avLst/>
+          </a:prstGeom>
+          <a:noFill/>
+          <a:ln/>
+        </p:spPr>
+        <p:txBody>
+          <a:bodyPr wrap="square" rtlCol="0" anchor="ctr"/>
+          <a:lstStyle/>
+          <a:p>
+            <a:pPr indent="0" marL="0">
+              <a:buNone/>
+            </a:pPr>
+            <a:r>
+              <a:rPr lang="en-US" sz="3600" b="1" dirty="0">
+                <a:solidFill>
+                  <a:srgbClr val="FFFFFF"/>
+                </a:solidFill>
+                <a:latin typeface="Calibri" pitchFamily="34" charset="0"/>
+                <a:ea typeface="Calibri" pitchFamily="34" charset="-122"/>
+                <a:cs typeface="Calibri" pitchFamily="34" charset="-120"/>
+              </a:rPr>
+              <a:t>Obrigado!</a:t>
+            </a:r>
+            <a:endParaRPr lang="en-US" sz="3600" dirty="0"/>
+          </a:p>
+        </p:txBody>
+      </p:sp>
+      <p:sp>
+        <p:nvSpPr>
+          <p:cNvPr id="5" name="Text 3"/>
+          <p:cNvSpPr txBox="1"/>
+          <p:nvPr/>
+        </p:nvSpPr>
+        <p:spPr>
+          <a:xfrm>
+            <a:off x="640080" y="3429000"/>
+            <a:ext cx="7315200" cy="457200"/>
+          </a:xfrm>
+          <a:prstGeom prst="rect">
+            <a:avLst/>
+          </a:prstGeom>
+          <a:noFill/>
+          <a:ln/>
+        </p:spPr>
+        <p:txBody>
+          <a:bodyPr wrap="square" rtlCol="0" anchor="ctr"/>
+          <a:lstStyle/>
+          <a:p>
+            <a:pPr indent="0" marL="0">
+              <a:buNone/>
+            </a:pPr>
+            <a:r>
+              <a:rPr lang="en-US" sz="1800" i="1" dirty="0">
+                <a:solidFill>
+                  <a:srgbClr val="E9C46A"/>
+                </a:solidFill>
+                <a:latin typeface="Calibri" pitchFamily="34" charset="0"/>
+                <a:ea typeface="Calibri" pitchFamily="34" charset="-122"/>
+                <a:cs typeface="Calibri" pitchFamily="34" charset="-120"/>
+              </a:rPr>
+              <a:t>Perguntas e debate</a:t>
+            </a:r>
+            <a:endParaRPr lang="en-US" sz="1800" dirty="0"/>
+          </a:p>
+        </p:txBody>
+      </p:sp>
+      <p:sp>
+        <p:nvSpPr>
+          <p:cNvPr id="6" name="Text 4"/>
+          <p:cNvSpPr txBox="1"/>
+          <p:nvPr/>
+        </p:nvSpPr>
+        <p:spPr>
+          <a:xfrm>
+            <a:off x="640080" y="6217920"/>
+            <a:ext cx="9144000" cy="365760"/>
+          </a:xfrm>
+          <a:prstGeom prst="rect">
+            <a:avLst/>
+          </a:prstGeom>
+          <a:noFill/>
+          <a:ln/>
+        </p:spPr>
+        <p:txBody>
+          <a:bodyPr wrap="square" rtlCol="0" anchor="ctr"/>
+          <a:lstStyle/>
+          <a:p>
+            <a:pPr indent="0" marL="0">
+              <a:buNone/>
+            </a:pPr>
+            <a:r>
+              <a:rPr lang="en-US" sz="1200" dirty="0">
+                <a:solidFill>
+                  <a:srgbClr val="778DA9"/>
+                </a:solidFill>
+                <a:latin typeface="Calibri" pitchFamily="34" charset="0"/>
+                <a:ea typeface="Calibri" pitchFamily="34" charset="-122"/>
+                <a:cs typeface="Calibri" pitchFamily="34" charset="-120"/>
+              </a:rPr>
+              <a:t>[GRUPO — substituir]  ·  Armazenamento DAS e RAID para SBD — UFRJ</a:t>
+            </a:r>
+            <a:endParaRPr lang="en-US" sz="1200" dirty="0"/>
           </a:p>
         </p:txBody>
       </p:sp>
@@ -15336,6 +16723,10 @@
             </a:outerShdw>
           </a:effectLst>
         </p:spPr>
+        <p:txBody>
+          <a:bodyPr/>
+          <a:p/>
+        </p:txBody>
       </p:sp>
       <p:sp>
         <p:nvSpPr>
@@ -15670,6 +17061,10 @@
             </a:outerShdw>
           </a:effectLst>
         </p:spPr>
+        <p:txBody>
+          <a:bodyPr/>
+          <a:p/>
+        </p:txBody>
       </p:sp>
       <p:sp>
         <p:nvSpPr>
@@ -15782,6 +17177,10 @@
             </a:outerShdw>
           </a:effectLst>
         </p:spPr>
+        <p:txBody>
+          <a:bodyPr/>
+          <a:p/>
+        </p:txBody>
       </p:sp>
       <p:sp>
         <p:nvSpPr>
@@ -15894,6 +17293,10 @@
             </a:outerShdw>
           </a:effectLst>
         </p:spPr>
+        <p:txBody>
+          <a:bodyPr/>
+          <a:p/>
+        </p:txBody>
       </p:sp>
       <p:sp>
         <p:nvSpPr>
@@ -16155,6 +17558,10 @@
             </a:outerShdw>
           </a:effectLst>
         </p:spPr>
+        <p:txBody>
+          <a:bodyPr/>
+          <a:p/>
+        </p:txBody>
       </p:sp>
       <p:sp>
         <p:nvSpPr>
@@ -16175,6 +17582,10 @@
           </a:solidFill>
           <a:ln/>
         </p:spPr>
+        <p:txBody>
+          <a:bodyPr/>
+          <a:p/>
+        </p:txBody>
       </p:sp>
       <p:sp>
         <p:nvSpPr>
@@ -16353,6 +17764,10 @@
           </a:solidFill>
           <a:ln/>
         </p:spPr>
+        <p:txBody>
+          <a:bodyPr/>
+          <a:p/>
+        </p:txBody>
       </p:sp>
       <p:sp>
         <p:nvSpPr>
@@ -16426,6 +17841,10 @@
             </a:outerShdw>
           </a:effectLst>
         </p:spPr>
+        <p:txBody>
+          <a:bodyPr/>
+          <a:p/>
+        </p:txBody>
       </p:sp>
       <p:sp>
         <p:nvSpPr>
@@ -16446,6 +17865,10 @@
           </a:solidFill>
           <a:ln/>
         </p:spPr>
+        <p:txBody>
+          <a:bodyPr/>
+          <a:p/>
+        </p:txBody>
       </p:sp>
       <p:sp>
         <p:nvSpPr>
@@ -16624,6 +18047,10 @@
           </a:solidFill>
           <a:ln/>
         </p:spPr>
+        <p:txBody>
+          <a:bodyPr/>
+          <a:p/>
+        </p:txBody>
       </p:sp>
       <p:sp>
         <p:nvSpPr>
@@ -16697,6 +18124,10 @@
             </a:outerShdw>
           </a:effectLst>
         </p:spPr>
+        <p:txBody>
+          <a:bodyPr/>
+          <a:p/>
+        </p:txBody>
       </p:sp>
       <p:sp>
         <p:nvSpPr>
@@ -16717,6 +18148,10 @@
           </a:solidFill>
           <a:ln/>
         </p:spPr>
+        <p:txBody>
+          <a:bodyPr/>
+          <a:p/>
+        </p:txBody>
       </p:sp>
       <p:sp>
         <p:nvSpPr>
@@ -16895,6 +18330,10 @@
           </a:solidFill>
           <a:ln/>
         </p:spPr>
+        <p:txBody>
+          <a:bodyPr/>
+          <a:p/>
+        </p:txBody>
       </p:sp>
       <p:sp>
         <p:nvSpPr>
@@ -16929,7 +18368,7 @@
                 <a:ea typeface="Calibri" pitchFamily="34" charset="-122"/>
                 <a:cs typeface="Calibri" pitchFamily="34" charset="-120"/>
               </a:rPr>
-              <a:t>Padrão em SBD</a:t>
+              <a:t>Relevante em HDD/backplanes</a:t>
             </a:r>
             <a:endParaRPr lang="en-US" sz="1150" dirty="0"/>
           </a:p>
@@ -17117,6 +18556,10 @@
             </a:outerShdw>
           </a:effectLst>
         </p:spPr>
+        <p:txBody>
+          <a:bodyPr/>
+          <a:p/>
+        </p:txBody>
       </p:sp>
       <p:sp>
         <p:nvSpPr>
@@ -17137,6 +18580,10 @@
           </a:solidFill>
           <a:ln/>
         </p:spPr>
+        <p:txBody>
+          <a:bodyPr/>
+          <a:p/>
+        </p:txBody>
       </p:sp>
       <p:sp>
         <p:nvSpPr>
@@ -17327,6 +18774,10 @@
             </a:outerShdw>
           </a:effectLst>
         </p:spPr>
+        <p:txBody>
+          <a:bodyPr/>
+          <a:p/>
+        </p:txBody>
       </p:sp>
       <p:sp>
         <p:nvSpPr>
@@ -17347,6 +18798,10 @@
           </a:solidFill>
           <a:ln/>
         </p:spPr>
+        <p:txBody>
+          <a:bodyPr/>
+          <a:p/>
+        </p:txBody>
       </p:sp>
       <p:sp>
         <p:nvSpPr>
@@ -17498,7 +18953,7 @@
                 <a:ea typeface="Calibri" pitchFamily="34" charset="-122"/>
                 <a:cs typeface="Calibri" pitchFamily="34" charset="-120"/>
               </a:rPr>
-              <a:t>Host-cêntrica. USB4 Versão 2.0 (2022) chega a 80 Gbps simétricos / 120 Gbps assimétricos via PAM3.</a:t>
+              <a:t>Host-cêntrica. USB4 Versão 2.0 (2022) chega a 80 Gbps; 120 Gbps opcional e assimétrico (host/cabo/dispositivo compatíveis) via PAM3.</a:t>
             </a:r>
             <a:endParaRPr lang="en-US" sz="1250" dirty="0"/>
           </a:p>
@@ -17537,6 +18992,10 @@
             </a:outerShdw>
           </a:effectLst>
         </p:spPr>
+        <p:txBody>
+          <a:bodyPr/>
+          <a:p/>
+        </p:txBody>
       </p:sp>
       <p:sp>
         <p:nvSpPr>
@@ -17557,6 +19016,10 @@
           </a:solidFill>
           <a:ln/>
         </p:spPr>
+        <p:txBody>
+          <a:bodyPr/>
+          <a:p/>
+        </p:txBody>
       </p:sp>
       <p:sp>
         <p:nvSpPr>
@@ -17935,6 +19398,10 @@
             </a:outerShdw>
           </a:effectLst>
         </p:spPr>
+        <p:txBody>
+          <a:bodyPr/>
+          <a:p/>
+        </p:txBody>
       </p:sp>
       <p:sp>
         <p:nvSpPr>
@@ -18118,6 +19585,10 @@
             </a:outerShdw>
           </a:effectLst>
         </p:spPr>
+        <p:txBody>
+          <a:bodyPr/>
+          <a:p/>
+        </p:txBody>
       </p:sp>
       <p:sp>
         <p:nvSpPr>
@@ -18519,6 +19990,10 @@
             <a:prstDash val="solid"/>
           </a:ln>
         </p:spPr>
+        <p:txBody>
+          <a:bodyPr/>
+          <a:p/>
+        </p:txBody>
       </p:sp>
       <p:sp>
         <p:nvSpPr>
@@ -18622,6 +20097,10 @@
             <a:prstDash val="solid"/>
           </a:ln>
         </p:spPr>
+        <p:txBody>
+          <a:bodyPr/>
+          <a:p/>
+        </p:txBody>
       </p:sp>
       <p:sp>
         <p:nvSpPr>
@@ -18725,6 +20204,10 @@
             <a:prstDash val="solid"/>
           </a:ln>
         </p:spPr>
+        <p:txBody>
+          <a:bodyPr/>
+          <a:p/>
+        </p:txBody>
       </p:sp>
       <p:sp>
         <p:nvSpPr>
@@ -18828,6 +20311,10 @@
             <a:prstDash val="solid"/>
           </a:ln>
         </p:spPr>
+        <p:txBody>
+          <a:bodyPr/>
+          <a:p/>
+        </p:txBody>
       </p:sp>
       <p:sp>
         <p:nvSpPr>
@@ -18928,6 +20415,10 @@
             <a:prstDash val="dash"/>
           </a:ln>
         </p:spPr>
+        <p:txBody>
+          <a:bodyPr/>
+          <a:p/>
+        </p:txBody>
       </p:sp>
       <p:sp>
         <p:nvSpPr>
@@ -19052,6 +20543,10 @@
             <a:prstDash val="solid"/>
           </a:ln>
         </p:spPr>
+        <p:txBody>
+          <a:bodyPr/>
+          <a:p/>
+        </p:txBody>
       </p:sp>
       <p:sp>
         <p:nvSpPr>
@@ -19155,6 +20650,10 @@
             <a:prstDash val="solid"/>
           </a:ln>
         </p:spPr>
+        <p:txBody>
+          <a:bodyPr/>
+          <a:p/>
+        </p:txBody>
       </p:sp>
       <p:sp>
         <p:nvSpPr>
@@ -19219,6 +20718,10 @@
             <a:prstDash val="solid"/>
           </a:ln>
         </p:spPr>
+        <p:txBody>
+          <a:bodyPr/>
+          <a:p/>
+        </p:txBody>
       </p:sp>
       <p:sp>
         <p:nvSpPr>
@@ -19283,6 +20786,10 @@
             <a:prstDash val="solid"/>
           </a:ln>
         </p:spPr>
+        <p:txBody>
+          <a:bodyPr/>
+          <a:p/>
+        </p:txBody>
       </p:sp>
       <p:sp>
         <p:nvSpPr>
@@ -19386,6 +20893,10 @@
             <a:prstDash val="solid"/>
           </a:ln>
         </p:spPr>
+        <p:txBody>
+          <a:bodyPr/>
+          <a:p/>
+        </p:txBody>
       </p:sp>
       <p:sp>
         <p:nvSpPr>
@@ -19450,6 +20961,10 @@
             <a:prstDash val="solid"/>
           </a:ln>
         </p:spPr>
+        <p:txBody>
+          <a:bodyPr/>
+          <a:p/>
+        </p:txBody>
       </p:sp>
       <p:sp>
         <p:nvSpPr>
@@ -19514,6 +21029,10 @@
             <a:prstDash val="solid"/>
           </a:ln>
         </p:spPr>
+        <p:txBody>
+          <a:bodyPr/>
+          <a:p/>
+        </p:txBody>
       </p:sp>
       <p:sp>
         <p:nvSpPr>
@@ -19617,6 +21136,10 @@
             <a:prstDash val="solid"/>
           </a:ln>
         </p:spPr>
+        <p:txBody>
+          <a:bodyPr/>
+          <a:p/>
+        </p:txBody>
       </p:sp>
       <p:sp>
         <p:nvSpPr>
@@ -19681,6 +21204,10 @@
             <a:prstDash val="solid"/>
           </a:ln>
         </p:spPr>
+        <p:txBody>
+          <a:bodyPr/>
+          <a:p/>
+        </p:txBody>
       </p:sp>
       <p:sp>
         <p:nvSpPr>
@@ -19745,6 +21272,10 @@
             <a:prstDash val="solid"/>
           </a:ln>
         </p:spPr>
+        <p:txBody>
+          <a:bodyPr/>
+          <a:p/>
+        </p:txBody>
       </p:sp>
       <p:sp>
         <p:nvSpPr>
@@ -19848,6 +21379,10 @@
             <a:prstDash val="solid"/>
           </a:ln>
         </p:spPr>
+        <p:txBody>
+          <a:bodyPr/>
+          <a:p/>
+        </p:txBody>
       </p:sp>
       <p:sp>
         <p:nvSpPr>
@@ -19912,6 +21447,10 @@
             <a:prstDash val="solid"/>
           </a:ln>
         </p:spPr>
+        <p:txBody>
+          <a:bodyPr/>
+          <a:p/>
+        </p:txBody>
       </p:sp>
       <p:sp>
         <p:nvSpPr>
@@ -19976,6 +21515,10 @@
             <a:prstDash val="solid"/>
           </a:ln>
         </p:spPr>
+        <p:txBody>
+          <a:bodyPr/>
+          <a:p/>
+        </p:txBody>
       </p:sp>
       <p:sp>
         <p:nvSpPr>
@@ -20329,6 +21872,10 @@
             <a:prstDash val="solid"/>
           </a:ln>
         </p:spPr>
+        <p:txBody>
+          <a:bodyPr/>
+          <a:p/>
+        </p:txBody>
       </p:sp>
       <p:sp>
         <p:nvSpPr>
@@ -20393,6 +21940,10 @@
             <a:prstDash val="solid"/>
           </a:ln>
         </p:spPr>
+        <p:txBody>
+          <a:bodyPr/>
+          <a:p/>
+        </p:txBody>
       </p:sp>
       <p:sp>
         <p:nvSpPr>
@@ -20457,6 +22008,10 @@
             <a:prstDash val="solid"/>
           </a:ln>
         </p:spPr>
+        <p:txBody>
+          <a:bodyPr/>
+          <a:p/>
+        </p:txBody>
       </p:sp>
       <p:sp>
         <p:nvSpPr>
@@ -20560,6 +22115,10 @@
             <a:prstDash val="solid"/>
           </a:ln>
         </p:spPr>
+        <p:txBody>
+          <a:bodyPr/>
+          <a:p/>
+        </p:txBody>
       </p:sp>
       <p:sp>
         <p:nvSpPr>
@@ -20624,6 +22183,10 @@
             <a:prstDash val="solid"/>
           </a:ln>
         </p:spPr>
+        <p:txBody>
+          <a:bodyPr/>
+          <a:p/>
+        </p:txBody>
       </p:sp>
       <p:sp>
         <p:nvSpPr>
@@ -20688,6 +22251,10 @@
             <a:prstDash val="solid"/>
           </a:ln>
         </p:spPr>
+        <p:txBody>
+          <a:bodyPr/>
+          <a:p/>
+        </p:txBody>
       </p:sp>
       <p:sp>
         <p:nvSpPr>
@@ -20842,7 +22409,7 @@
                 <a:ea typeface="Calibri" pitchFamily="34" charset="-122"/>
                 <a:cs typeface="Calibri" pitchFamily="34" charset="-120"/>
               </a:rPr>
-              <a:t>Toda escrita é replicada integralmente em 2 discos; leituras podem ser divididas entre as cópias. "Shadowing" é termo histórico (ex.: Tandem NonStop) equivalente a mirroring — mesma técnica, nomes diferentes.</a:t>
+              <a:t>Toda escrita é replicada integralmente em 2 discos; leituras podem ser divididas entre as cópias. Disk shadowing pode nomear espelhamento histórico; shadow paging, snapshots e cópias lógicas não são RAID 1.</a:t>
             </a:r>
             <a:endParaRPr lang="en-US" sz="1250" dirty="0"/>
           </a:p>
@@ -20870,6 +22437,10 @@
             <a:prstDash val="solid"/>
           </a:ln>
         </p:spPr>
+        <p:txBody>
+          <a:bodyPr/>
+          <a:p/>
+        </p:txBody>
       </p:sp>
       <p:sp>
         <p:nvSpPr>
@@ -20934,6 +22505,10 @@
             <a:prstDash val="solid"/>
           </a:ln>
         </p:spPr>
+        <p:txBody>
+          <a:bodyPr/>
+          <a:p/>
+        </p:txBody>
       </p:sp>
       <p:sp>
         <p:nvSpPr>
@@ -20998,6 +22573,10 @@
             <a:prstDash val="solid"/>
           </a:ln>
         </p:spPr>
+        <p:txBody>
+          <a:bodyPr/>
+          <a:p/>
+        </p:txBody>
       </p:sp>
       <p:sp>
         <p:nvSpPr>
@@ -21062,6 +22641,10 @@
             <a:prstDash val="solid"/>
           </a:ln>
         </p:spPr>
+        <p:txBody>
+          <a:bodyPr/>
+          <a:p/>
+        </p:txBody>
       </p:sp>
       <p:sp>
         <p:nvSpPr>
@@ -21165,6 +22748,10 @@
             <a:prstDash val="solid"/>
           </a:ln>
         </p:spPr>
+        <p:txBody>
+          <a:bodyPr/>
+          <a:p/>
+        </p:txBody>
       </p:sp>
       <p:sp>
         <p:nvSpPr>
@@ -21605,6 +23192,10 @@
             </a:outerShdw>
           </a:effectLst>
         </p:spPr>
+        <p:txBody>
+          <a:bodyPr/>
+          <a:p/>
+        </p:txBody>
       </p:sp>
       <p:sp>
         <p:nvSpPr>
@@ -21720,6 +23311,10 @@
             </a:outerShdw>
           </a:effectLst>
         </p:spPr>
+        <p:txBody>
+          <a:bodyPr/>
+          <a:p/>
+        </p:txBody>
       </p:sp>
       <p:sp>
         <p:nvSpPr>
@@ -21835,6 +23430,10 @@
             </a:outerShdw>
           </a:effectLst>
         </p:spPr>
+        <p:txBody>
+          <a:bodyPr/>
+          <a:p/>
+        </p:txBody>
       </p:sp>
       <p:sp>
         <p:nvSpPr>
@@ -21950,6 +23549,10 @@
             </a:outerShdw>
           </a:effectLst>
         </p:spPr>
+        <p:txBody>
+          <a:bodyPr/>
+          <a:p/>
+        </p:txBody>
       </p:sp>
       <p:sp>
         <p:nvSpPr>
@@ -22065,6 +23668,10 @@
             </a:outerShdw>
           </a:effectLst>
         </p:spPr>
+        <p:txBody>
+          <a:bodyPr/>
+          <a:p/>
+        </p:txBody>
       </p:sp>
       <p:sp>
         <p:nvSpPr>

--- a/DAS e RAID/DAS_RAID_Slides.pptx
+++ b/DAS e RAID/DAS_RAID_Slides.pptx
@@ -7601,7 +7601,7 @@
               </a:defRPr>
             </a:pPr>
             <a:r>
-              <a:t>Pendência humana</a:t>
+              <a:t>Consolidação</a:t>
             </a:r>
           </a:p>
         </p:txBody>
@@ -7637,7 +7637,7 @@
               </a:defRPr>
             </a:pPr>
             <a:r>
-              <a:t>Confirmar grupo e registrar divisão real; nada foi inventado.</a:t>
+              <a:t>Raphael coordenou a consolidação em 06/09; o Codex conferiu os artefatos e a divisão final foi registrada.</a:t>
             </a:r>
           </a:p>
         </p:txBody>

--- a/DAS e RAID/DAS_RAID_Slides.pptx
+++ b/DAS e RAID/DAS_RAID_Slides.pptx
@@ -3535,7 +3535,7 @@
                         </a:defRPr>
                       </a:pPr>
                       <a:r>
-                        <a:t>123311073</a:t>
+                        <a:t>123420783</a:t>
                       </a:r>
                     </a:p>
                   </a:txBody>

--- a/DAS e RAID/DAS_RAID_Slides.pptx
+++ b/DAS e RAID/DAS_RAID_Slides.pptx
@@ -5833,8 +5833,8 @@
         </p:nvSpPr>
         <p:spPr>
           <a:xfrm>
-            <a:off x="640080" y="6035040"/>
-            <a:ext cx="8229600" cy="365760"/>
+            <a:off x="640080" y="5700000"/>
+            <a:ext cx="9144000" cy="1050000"/>
           </a:xfrm>
           <a:prstGeom prst="rect">
             <a:avLst/>
@@ -5845,10 +5845,6 @@
           </a:ln>
         </p:spPr>
         <p:txBody>
-          <a:bodyPr anchorCtr="0" anchor="ctr" bIns="45700" lIns="91425" spcFirstLastPara="1" rIns="91425" wrap="square" tIns="45700">
-            <a:noAutofit/>
-          </a:bodyPr>
-          <a:lstStyle/>
           <a:p>
             <a:pPr indent="0" lvl="0" marL="0" marR="0" rtl="0" algn="l">
               <a:spcBef>
@@ -5865,7 +5861,7 @@
               <a:buNone/>
             </a:pPr>
             <a:r>
-              <a:rPr b="0" i="0" lang="en-US" sz="1200" u="none" cap="none" strike="noStrike">
+              <a:rPr b="0" i="0" lang="en-US" sz="1100" u="none" cap="none" strike="noStrike">
                 <a:solidFill>
                   <a:srgbClr val="778DA9"/>
                 </a:solidFill>
@@ -5874,7 +5870,192 @@
                 <a:cs typeface="Calibri"/>
                 <a:sym typeface="Calibri"/>
               </a:rPr>
-              <a:t>[GRUPO — substituir]  ·  [Nomes dos integrantes e DRE]</a:t>
+              <a:t>Bernardo Brandão Pozzato Carvalho Costa — DRE 123289593</a:t>
+            </a:r>
+            <a:endParaRPr b="0" i="0" sz="1200" u="none" cap="none" strike="noStrike">
+              <a:solidFill>
+                <a:schemeClr val="dk1"/>
+              </a:solidFill>
+              <a:latin typeface="Calibri"/>
+              <a:ea typeface="Calibri"/>
+              <a:cs typeface="Calibri"/>
+              <a:sym typeface="Calibri"/>
+            </a:endParaRPr>
+          </a:p>
+          <a:p>
+            <a:pPr indent="0" lvl="0" marL="0" marR="0" rtl="0" algn="l">
+              <a:spcBef>
+                <a:spcPts val="0"/>
+              </a:spcBef>
+              <a:spcAft>
+                <a:spcPts val="0"/>
+              </a:spcAft>
+              <a:buClr>
+                <a:srgbClr val="778DA9"/>
+              </a:buClr>
+              <a:buSzPts val="1200"/>
+              <a:buFont typeface="Calibri"/>
+              <a:buNone/>
+            </a:pPr>
+            <a:r>
+              <a:rPr b="0" i="0" lang="en-US" sz="1100" u="none" cap="none" strike="noStrike">
+                <a:solidFill>
+                  <a:srgbClr val="778DA9"/>
+                </a:solidFill>
+                <a:latin typeface="Calibri"/>
+                <a:ea typeface="Calibri"/>
+                <a:cs typeface="Calibri"/>
+                <a:sym typeface="Calibri"/>
+              </a:rPr>
+              <a:t>Enzo de Carvalho Sampaio — DRE 123386206</a:t>
+            </a:r>
+            <a:endParaRPr b="0" i="0" sz="1200" u="none" cap="none" strike="noStrike">
+              <a:solidFill>
+                <a:schemeClr val="dk1"/>
+              </a:solidFill>
+              <a:latin typeface="Calibri"/>
+              <a:ea typeface="Calibri"/>
+              <a:cs typeface="Calibri"/>
+              <a:sym typeface="Calibri"/>
+            </a:endParaRPr>
+          </a:p>
+          <a:p>
+            <a:pPr indent="0" lvl="0" marL="0" marR="0" rtl="0" algn="l">
+              <a:spcBef>
+                <a:spcPts val="0"/>
+              </a:spcBef>
+              <a:spcAft>
+                <a:spcPts val="0"/>
+              </a:spcAft>
+              <a:buClr>
+                <a:srgbClr val="778DA9"/>
+              </a:buClr>
+              <a:buSzPts val="1200"/>
+              <a:buFont typeface="Calibri"/>
+              <a:buNone/>
+            </a:pPr>
+            <a:r>
+              <a:rPr b="0" i="0" lang="en-US" sz="1100" u="none" cap="none" strike="noStrike">
+                <a:solidFill>
+                  <a:srgbClr val="778DA9"/>
+                </a:solidFill>
+                <a:latin typeface="Calibri"/>
+                <a:ea typeface="Calibri"/>
+                <a:cs typeface="Calibri"/>
+                <a:sym typeface="Calibri"/>
+              </a:rPr>
+              <a:t>Gabriel Schmitz Corrêa Rizawinsk — DRE 123225573</a:t>
+            </a:r>
+            <a:endParaRPr b="0" i="0" sz="1200" u="none" cap="none" strike="noStrike">
+              <a:solidFill>
+                <a:schemeClr val="dk1"/>
+              </a:solidFill>
+              <a:latin typeface="Calibri"/>
+              <a:ea typeface="Calibri"/>
+              <a:cs typeface="Calibri"/>
+              <a:sym typeface="Calibri"/>
+            </a:endParaRPr>
+          </a:p>
+          <a:p>
+            <a:pPr indent="0" lvl="0" marL="0" marR="0" rtl="0" algn="l">
+              <a:spcBef>
+                <a:spcPts val="0"/>
+              </a:spcBef>
+              <a:spcAft>
+                <a:spcPts val="0"/>
+              </a:spcAft>
+              <a:buClr>
+                <a:srgbClr val="778DA9"/>
+              </a:buClr>
+              <a:buSzPts val="1200"/>
+              <a:buFont typeface="Calibri"/>
+              <a:buNone/>
+            </a:pPr>
+            <a:r>
+              <a:rPr b="0" i="0" lang="en-US" sz="1100" u="none" cap="none" strike="noStrike">
+                <a:solidFill>
+                  <a:srgbClr val="778DA9"/>
+                </a:solidFill>
+                <a:latin typeface="Calibri"/>
+                <a:ea typeface="Calibri"/>
+                <a:cs typeface="Calibri"/>
+                <a:sym typeface="Calibri"/>
+              </a:rPr>
+              <a:t>Guilherme En Shih Hu — DRE 123224674</a:t>
+            </a:r>
+            <a:endParaRPr b="0" i="0" sz="1200" u="none" cap="none" strike="noStrike">
+              <a:solidFill>
+                <a:schemeClr val="dk1"/>
+              </a:solidFill>
+              <a:latin typeface="Calibri"/>
+              <a:ea typeface="Calibri"/>
+              <a:cs typeface="Calibri"/>
+              <a:sym typeface="Calibri"/>
+            </a:endParaRPr>
+          </a:p>
+          <a:p>
+            <a:pPr indent="0" lvl="0" marL="0" marR="0" rtl="0" algn="l">
+              <a:spcBef>
+                <a:spcPts val="0"/>
+              </a:spcBef>
+              <a:spcAft>
+                <a:spcPts val="0"/>
+              </a:spcAft>
+              <a:buClr>
+                <a:srgbClr val="778DA9"/>
+              </a:buClr>
+              <a:buSzPts val="1200"/>
+              <a:buFont typeface="Calibri"/>
+              <a:buNone/>
+            </a:pPr>
+            <a:r>
+              <a:rPr b="0" i="0" lang="en-US" sz="1100" u="none" cap="none" strike="noStrike">
+                <a:solidFill>
+                  <a:srgbClr val="778DA9"/>
+                </a:solidFill>
+                <a:latin typeface="Calibri"/>
+                <a:ea typeface="Calibri"/>
+                <a:cs typeface="Calibri"/>
+                <a:sym typeface="Calibri"/>
+              </a:rPr>
+              <a:t>Raphael Henrique da Silva Pereira — DRE 123311073</a:t>
+            </a:r>
+            <a:endParaRPr b="0" i="0" sz="1200" u="none" cap="none" strike="noStrike">
+              <a:solidFill>
+                <a:schemeClr val="dk1"/>
+              </a:solidFill>
+              <a:latin typeface="Calibri"/>
+              <a:ea typeface="Calibri"/>
+              <a:cs typeface="Calibri"/>
+              <a:sym typeface="Calibri"/>
+            </a:endParaRPr>
+          </a:p>
+          <a:p>
+            <a:pPr indent="0" lvl="0" marL="0" marR="0" rtl="0" algn="l">
+              <a:spcBef>
+                <a:spcPts val="0"/>
+              </a:spcBef>
+              <a:spcAft>
+                <a:spcPts val="0"/>
+              </a:spcAft>
+              <a:buClr>
+                <a:srgbClr val="778DA9"/>
+              </a:buClr>
+              <a:buSzPts val="1200"/>
+              <a:buFont typeface="Calibri"/>
+              <a:buNone/>
+            </a:pPr>
+            <a:r>
+              <a:rPr b="0" i="0" lang="en-US" sz="1100" u="none" cap="none" strike="noStrike">
+                <a:solidFill>
+                  <a:srgbClr val="778DA9"/>
+                </a:solidFill>
+                <a:latin typeface="Calibri"/>
+                <a:ea typeface="Calibri"/>
+                <a:cs typeface="Calibri"/>
+                <a:sym typeface="Calibri"/>
+              </a:rPr>
+              <a:t>Vivian Maria da Silva e Souza — DRE 123205793</a:t>
             </a:r>
             <a:endParaRPr b="0" i="0" sz="1200" u="none" cap="none" strike="noStrike">
               <a:solidFill>
@@ -30045,7 +30226,7 @@
                 <a:cs typeface="Calibri"/>
                 <a:sym typeface="Calibri"/>
               </a:rPr>
-              <a:t>[GRUPO — substituir]  ·  Armazenamento DAS e RAID para SBD — UFRJ</a:t>
+              <a:t>Bernardo, Enzo, Gabriel, Guilherme, Raphael e Vivian  ·  Armazenamento DAS e RAID para SBD — UFRJ</a:t>
             </a:r>
             <a:endParaRPr b="0" i="0" sz="1200" u="none" cap="none" strike="noStrike">
               <a:solidFill>
@@ -31702,7 +31883,7 @@
                 <a:cs typeface="Calibri"/>
                 <a:sym typeface="Calibri"/>
               </a:rPr>
-              <a:t>SATA III</a:t>
+              <a:t>SATA 6 Gb/s</a:t>
             </a:r>
             <a:endParaRPr b="0" i="0" sz="1800" u="none" cap="none" strike="noStrike">
               <a:solidFill>
@@ -31828,7 +32009,7 @@
                 <a:cs typeface="Calibri"/>
                 <a:sym typeface="Calibri"/>
               </a:rPr>
-              <a:t>Interface serial ponto a ponto, padrão em desktops e servidores de entrada. NCQ até 32 comandos.</a:t>
+              <a:t>Interface serial ponto a ponto, padrão em desktops e servidores de entrada. NCQ até 32 comandos. "SATA I/II/III" são nomes informais que a SATA-IO recomenda evitar.</a:t>
             </a:r>
             <a:endParaRPr b="0" i="0" sz="1250" u="none" cap="none" strike="noStrike">
               <a:solidFill>
@@ -32226,7 +32407,7 @@
                 <a:cs typeface="Calibri"/>
                 <a:sym typeface="Calibri"/>
               </a:rPr>
-              <a:t>6 Gbps (idêntico ao SATA)</a:t>
+              <a:t>Até 6 Gb/s (conforme a revisão)</a:t>
             </a:r>
             <a:endParaRPr b="0" i="0" sz="1300" u="none" cap="none" strike="noStrike">
               <a:solidFill>
@@ -32289,7 +32470,7 @@
                 <a:cs typeface="Calibri"/>
                 <a:sym typeface="Calibri"/>
               </a:rPr>
-              <a:t>Variante externa do SATA. Sem fornecimento de energia — hoje em declínio frente ao USB.</a:t>
+              <a:t>Variante externa do SATA, mesmo protocolo do host/dispositivo. Sem fornecimento de energia — hoje em declínio frente ao USB.</a:t>
             </a:r>
             <a:endParaRPr b="0" i="0" sz="1250" u="none" cap="none" strike="noStrike">
               <a:solidFill>
@@ -32687,7 +32868,7 @@
                 <a:cs typeface="Calibri"/>
                 <a:sym typeface="Calibri"/>
               </a:rPr>
-              <a:t>22,5 Gbps (≈2.400 MB/s)</a:t>
+              <a:t>22,5 Gbaud (≈2.400 MB/s)</a:t>
             </a:r>
             <a:endParaRPr b="0" i="0" sz="1300" u="none" cap="none" strike="noStrike">
               <a:solidFill>
@@ -32750,7 +32931,7 @@
                 <a:cs typeface="Calibri"/>
                 <a:sym typeface="Calibri"/>
               </a:rPr>
-              <a:t>Classe empresarial: dual-port, multi-iniciador via expansores, fila de até 254 comandos.</a:t>
+              <a:t>Classe empresarial: dual-port, multi-iniciador via expansores, fila mais profunda que o NCQ do SATA (até 254, a depender da controladora). Padrão INCITS 534-2019.</a:t>
             </a:r>
             <a:endParaRPr b="0" i="0" sz="1250" u="none" cap="none" strike="noStrike">
               <a:solidFill>
@@ -33722,7 +33903,7 @@
                 <a:cs typeface="Calibri"/>
                 <a:sym typeface="Calibri"/>
               </a:rPr>
-              <a:t>Até 80 Gbps (USB4 v2.0)</a:t>
+              <a:t>Até 80 Gb/s agregados (USB4 v2.0)</a:t>
             </a:r>
             <a:endParaRPr b="0" i="0" sz="1300" u="none" cap="none" strike="noStrike">
               <a:solidFill>
@@ -33785,7 +33966,7 @@
                 <a:cs typeface="Calibri"/>
                 <a:sym typeface="Calibri"/>
               </a:rPr>
-              <a:t>Host-cêntrica. USB4 Versão 2.0 (2022) chega a 80 Gbps simétricos / 120 Gbps assimétricos via PAM3.</a:t>
+              <a:t>Host-cêntrica. USB4 Versão 2.0 (2022) eleva a banda agregada a 80 Gb/s simétricos, com modo assimétrico opcional de 120/40 Gb/s via PAM3. Tunelamento de PCIe depende da implementação.</a:t>
             </a:r>
             <a:endParaRPr b="0" i="0" sz="1250" u="none" cap="none" strike="noStrike">
               <a:solidFill>
@@ -34138,7 +34319,7 @@
                 <a:cs typeface="Calibri"/>
                 <a:sym typeface="Calibri"/>
               </a:rPr>
-              <a:t>Ponte entre o barramento do host e SAS/SATA. JBOD (passthrough) ou RAID de hardware com cache/BBU.</a:t>
+              <a:t>Ponte entre o barramento do host e SAS/SATA. Modo passthrough expõe cada disco (apresentação às vezes chamada JBOD, que não é sinônimo de HBA) ou controladora RAID de hardware com cache/BBU.</a:t>
             </a:r>
             <a:endParaRPr b="0" i="0" sz="1250" u="none" cap="none" strike="noStrike">
               <a:solidFill>
